--- a/备选资产/结构图/双轨演进路线图-001/example.pptx
+++ b/备选资产/结构图/双轨演进路线图-001/example.pptx
@@ -2,13 +2,13 @@
 <file path=ppt/presentation.xml><?xml version="1.0" encoding="utf-8"?>
 <p:presentation xmlns:p="http://schemas.openxmlformats.org/presentationml/2006/main">
   <p:sldMasterIdLst>
-    <p:sldMasterId xmlns:r="http://schemas.openxmlformats.org/officeDocument/2006/relationships" id="2147483648" r:id="Rae44462fbc4e42e2"/>
+    <p:sldMasterId xmlns:r="http://schemas.openxmlformats.org/officeDocument/2006/relationships" id="2147483648" r:id="R7b6fd00bb5cd493e"/>
   </p:sldMasterIdLst>
   <p:notesMasterIdLst>
-    <p:notesMasterId xmlns:r="http://schemas.openxmlformats.org/officeDocument/2006/relationships" r:id="Rb52b61a1924b40f5"/>
+    <p:notesMasterId xmlns:r="http://schemas.openxmlformats.org/officeDocument/2006/relationships" r:id="Rd7b0815c87174723"/>
   </p:notesMasterIdLst>
   <p:sldIdLst>
-    <p:sldId xmlns:r="http://schemas.openxmlformats.org/officeDocument/2006/relationships" id="256" r:id="R74a6ca31b0bd4f88"/>
+    <p:sldId xmlns:r="http://schemas.openxmlformats.org/officeDocument/2006/relationships" id="256" r:id="Rce1894448d9b4268"/>
   </p:sldIdLst>
   <p:sldSz cx="12192000" cy="6858000"/>
   <p:notesSz cx="6858000" cy="9144000"/>
@@ -506,7 +506,7 @@
   </p:cSld>
   <p:clrMap bg1="lt1" tx1="dk1" bg2="lt2" tx2="dk2" accent1="accent1" accent2="accent2" accent3="accent3" accent4="accent4" accent5="accent5" accent6="accent6" hlink="hlink" folHlink="folHlink"/>
   <p:sldLayoutIdLst>
-    <p:sldLayoutId xmlns:r="http://schemas.openxmlformats.org/officeDocument/2006/relationships" id="2147483649" r:id="Rfc608056d960434e"/>
+    <p:sldLayoutId xmlns:r="http://schemas.openxmlformats.org/officeDocument/2006/relationships" id="2147483649" r:id="R551e9501874c47f0"/>
   </p:sldLayoutIdLst>
   <p:txStyles>
     <p:titleStyle>
@@ -1054,10 +1054,10 @@
       </p:grpSpPr>
       <p:sp>
         <p:nvSpPr>
-          <p:cNvPr id="35" name="">
-            <a:extLst xmlns:a="http://schemas.openxmlformats.org/drawingml/2006/main">
-              <a:ext uri="{FF2B5EF4-FFF2-40B4-BE49-F238E27FC236}">
-                <a16:creationId xmlns:a16="http://schemas.microsoft.com/office/drawing/2014/main" id="{85756496-7D49-427D-922E-EA48987336F7}"/>
+          <p:cNvPr id="51" name="">
+            <a:extLst xmlns:a="http://schemas.openxmlformats.org/drawingml/2006/main">
+              <a:ext uri="{FF2B5EF4-FFF2-40B4-BE49-F238E27FC236}">
+                <a16:creationId xmlns:a16="http://schemas.microsoft.com/office/drawing/2014/main" id="{10E99C6E-E8F4-4FD2-B56D-5016BBB8EE2B}"/>
               </a:ext>
             </a:extLst>
           </p:cNvPr>
@@ -1115,7 +1115,7 @@
           <p:cNvPr id="2" name="">
             <a:extLst xmlns:a="http://schemas.openxmlformats.org/drawingml/2006/main">
               <a:ext uri="{FF2B5EF4-FFF2-40B4-BE49-F238E27FC236}">
-                <a16:creationId xmlns:a16="http://schemas.microsoft.com/office/drawing/2014/main" id="{0BDE2E7D-50C7-4C6A-9A0F-833741C4BE3C}"/>
+                <a16:creationId xmlns:a16="http://schemas.microsoft.com/office/drawing/2014/main" id="{BCA7614B-06F4-4553-966B-949B23963E63}"/>
               </a:ext>
             </a:extLst>
           </p:cNvPr>
@@ -1163,7 +1163,7 @@
                 <a:ea typeface="Microsoft YaHei"/>
                 <a:cs typeface="Microsoft YaHei"/>
               </a:rPr>
-              <a:t>双轨演进路线图</a:t>
+              <a:t>共同起点 · 双轨并行演进</a:t>
             </a:r>
           </a:p>
         </p:txBody>
@@ -1173,229 +1173,80 @@
           <p:cNvPr id="3" name="">
             <a:extLst xmlns:a="http://schemas.openxmlformats.org/drawingml/2006/main">
               <a:ext uri="{FF2B5EF4-FFF2-40B4-BE49-F238E27FC236}">
-                <a16:creationId xmlns:a16="http://schemas.microsoft.com/office/drawing/2014/main" id="{B981D883-4DDC-4F57-95E8-6A968C75BD21}"/>
-              </a:ext>
-            </a:extLst>
-          </p:cNvPr>
-          <p:cNvSpPr>
-            <a:spLocks xmlns:a="http://schemas.openxmlformats.org/drawingml/2006/main" noGrp="1"/>
-          </p:cNvSpPr>
-          <p:nvPr/>
-        </p:nvSpPr>
-        <p:spPr>
-          <a:xfrm xmlns:a="http://schemas.openxmlformats.org/drawingml/2006/main" flipV="0">
-            <a:off x="1143000" y="2857500"/>
-            <a:ext cx="3302000" cy="857250"/>
-          </a:xfrm>
-          <a:prstGeom xmlns:a="http://schemas.openxmlformats.org/drawingml/2006/main" prst="line">
-            <a:avLst/>
-          </a:prstGeom>
-          <a:noFill xmlns:a="http://schemas.openxmlformats.org/drawingml/2006/main"/>
-          <a:ln xmlns:a="http://schemas.openxmlformats.org/drawingml/2006/main" w="171450">
+                <a16:creationId xmlns:a16="http://schemas.microsoft.com/office/drawing/2014/main" id="{1FDF0A56-C683-414B-8AEF-5234B16F132A}"/>
+              </a:ext>
+            </a:extLst>
+          </p:cNvPr>
+          <p:cNvSpPr>
+            <a:spLocks xmlns:a="http://schemas.openxmlformats.org/drawingml/2006/main" noGrp="1"/>
+          </p:cNvSpPr>
+          <p:nvPr/>
+        </p:nvSpPr>
+        <p:spPr>
+          <a:xfrm xmlns:a="http://schemas.openxmlformats.org/drawingml/2006/main">
+            <a:off x="685800" y="3200400"/>
+            <a:ext cx="1428750" cy="1428750"/>
+          </a:xfrm>
+          <a:prstGeom xmlns:a="http://schemas.openxmlformats.org/drawingml/2006/main" prst="ellipse">
+            <a:avLst/>
+          </a:prstGeom>
+          <a:solidFill xmlns:a="http://schemas.openxmlformats.org/drawingml/2006/main">
+            <a:srgbClr val="E2EAF4"/>
+          </a:solidFill>
+          <a:ln xmlns:a="http://schemas.openxmlformats.org/drawingml/2006/main" w="0">
+            <a:noFill/>
+            <a:prstDash val="solid"/>
+          </a:ln>
+        </p:spPr>
+      </p:sp>
+      <p:sp>
+        <p:nvSpPr>
+          <p:cNvPr id="4" name="PPAGENT_QA|parent=dual-track-start">
+            <a:extLst xmlns:a="http://schemas.openxmlformats.org/drawingml/2006/main">
+              <a:ext uri="{FF2B5EF4-FFF2-40B4-BE49-F238E27FC236}">
+                <a16:creationId xmlns:a16="http://schemas.microsoft.com/office/drawing/2014/main" id="{FC81A989-01C1-421D-8423-9691DEA6A3C5}"/>
+              </a:ext>
+            </a:extLst>
+          </p:cNvPr>
+          <p:cNvSpPr>
+            <a:spLocks xmlns:a="http://schemas.openxmlformats.org/drawingml/2006/main" noGrp="1"/>
+          </p:cNvSpPr>
+          <p:nvPr/>
+        </p:nvSpPr>
+        <p:spPr>
+          <a:xfrm xmlns:a="http://schemas.openxmlformats.org/drawingml/2006/main">
+            <a:off x="876300" y="3390900"/>
+            <a:ext cx="1047750" cy="1047750"/>
+          </a:xfrm>
+          <a:prstGeom xmlns:a="http://schemas.openxmlformats.org/drawingml/2006/main" prst="ellipse">
+            <a:avLst/>
+          </a:prstGeom>
+          <a:solidFill xmlns:a="http://schemas.openxmlformats.org/drawingml/2006/main">
+            <a:srgbClr val="FFFFFF"/>
+          </a:solidFill>
+          <a:ln xmlns:a="http://schemas.openxmlformats.org/drawingml/2006/main" w="47625">
             <a:solidFill>
               <a:srgbClr val="1677C8"/>
             </a:solidFill>
             <a:prstDash val="solid"/>
           </a:ln>
         </p:spPr>
-      </p:sp>
-      <p:sp>
-        <p:nvSpPr>
-          <p:cNvPr id="4" name="">
-            <a:extLst xmlns:a="http://schemas.openxmlformats.org/drawingml/2006/main">
-              <a:ext uri="{FF2B5EF4-FFF2-40B4-BE49-F238E27FC236}">
-                <a16:creationId xmlns:a16="http://schemas.microsoft.com/office/drawing/2014/main" id="{883A1A1C-59CB-4951-A4AE-E7BB6B5A43F6}"/>
-              </a:ext>
-            </a:extLst>
-          </p:cNvPr>
-          <p:cNvSpPr>
-            <a:spLocks xmlns:a="http://schemas.openxmlformats.org/drawingml/2006/main" noGrp="1"/>
-          </p:cNvSpPr>
-          <p:nvPr/>
-        </p:nvSpPr>
-        <p:spPr>
-          <a:xfrm xmlns:a="http://schemas.openxmlformats.org/drawingml/2006/main" flipV="1">
-            <a:off x="1143000" y="2857500"/>
-            <a:ext cx="3302000" cy="857250"/>
-          </a:xfrm>
-          <a:prstGeom xmlns:a="http://schemas.openxmlformats.org/drawingml/2006/main" prst="line">
-            <a:avLst/>
-          </a:prstGeom>
-          <a:noFill xmlns:a="http://schemas.openxmlformats.org/drawingml/2006/main"/>
-          <a:ln xmlns:a="http://schemas.openxmlformats.org/drawingml/2006/main" w="171450">
-            <a:solidFill>
-              <a:srgbClr val="00A8D8"/>
-            </a:solidFill>
-            <a:prstDash val="solid"/>
-          </a:ln>
-        </p:spPr>
-      </p:sp>
-      <p:sp>
-        <p:nvSpPr>
-          <p:cNvPr id="5" name="">
-            <a:extLst xmlns:a="http://schemas.openxmlformats.org/drawingml/2006/main">
-              <a:ext uri="{FF2B5EF4-FFF2-40B4-BE49-F238E27FC236}">
-                <a16:creationId xmlns:a16="http://schemas.microsoft.com/office/drawing/2014/main" id="{8E03BCE7-B92C-46EB-BEF3-55C4D4D9B7E4}"/>
-              </a:ext>
-            </a:extLst>
-          </p:cNvPr>
-          <p:cNvSpPr>
-            <a:spLocks xmlns:a="http://schemas.openxmlformats.org/drawingml/2006/main" noGrp="1"/>
-          </p:cNvSpPr>
-          <p:nvPr/>
-        </p:nvSpPr>
-        <p:spPr>
-          <a:xfrm xmlns:a="http://schemas.openxmlformats.org/drawingml/2006/main" flipV="1">
-            <a:off x="4445000" y="2857500"/>
-            <a:ext cx="3302000" cy="857250"/>
-          </a:xfrm>
-          <a:prstGeom xmlns:a="http://schemas.openxmlformats.org/drawingml/2006/main" prst="line">
-            <a:avLst/>
-          </a:prstGeom>
-          <a:noFill xmlns:a="http://schemas.openxmlformats.org/drawingml/2006/main"/>
-          <a:ln xmlns:a="http://schemas.openxmlformats.org/drawingml/2006/main" w="171450">
-            <a:solidFill>
-              <a:srgbClr val="1677C8"/>
-            </a:solidFill>
-            <a:prstDash val="solid"/>
-          </a:ln>
-        </p:spPr>
-      </p:sp>
-      <p:sp>
-        <p:nvSpPr>
-          <p:cNvPr id="6" name="">
-            <a:extLst xmlns:a="http://schemas.openxmlformats.org/drawingml/2006/main">
-              <a:ext uri="{FF2B5EF4-FFF2-40B4-BE49-F238E27FC236}">
-                <a16:creationId xmlns:a16="http://schemas.microsoft.com/office/drawing/2014/main" id="{94B44AE2-BC7D-4C07-853C-9E6CA6972E08}"/>
-              </a:ext>
-            </a:extLst>
-          </p:cNvPr>
-          <p:cNvSpPr>
-            <a:spLocks xmlns:a="http://schemas.openxmlformats.org/drawingml/2006/main" noGrp="1"/>
-          </p:cNvSpPr>
-          <p:nvPr/>
-        </p:nvSpPr>
-        <p:spPr>
-          <a:xfrm xmlns:a="http://schemas.openxmlformats.org/drawingml/2006/main" flipV="0">
-            <a:off x="4445000" y="2857500"/>
-            <a:ext cx="3302000" cy="857250"/>
-          </a:xfrm>
-          <a:prstGeom xmlns:a="http://schemas.openxmlformats.org/drawingml/2006/main" prst="line">
-            <a:avLst/>
-          </a:prstGeom>
-          <a:noFill xmlns:a="http://schemas.openxmlformats.org/drawingml/2006/main"/>
-          <a:ln xmlns:a="http://schemas.openxmlformats.org/drawingml/2006/main" w="171450">
-            <a:solidFill>
-              <a:srgbClr val="00A8D8"/>
-            </a:solidFill>
-            <a:prstDash val="solid"/>
-          </a:ln>
-        </p:spPr>
-      </p:sp>
-      <p:sp>
-        <p:nvSpPr>
-          <p:cNvPr id="7" name="">
-            <a:extLst xmlns:a="http://schemas.openxmlformats.org/drawingml/2006/main">
-              <a:ext uri="{FF2B5EF4-FFF2-40B4-BE49-F238E27FC236}">
-                <a16:creationId xmlns:a16="http://schemas.microsoft.com/office/drawing/2014/main" id="{8D531B9E-DC7B-492C-B580-DBC7613C42A9}"/>
-              </a:ext>
-            </a:extLst>
-          </p:cNvPr>
-          <p:cNvSpPr>
-            <a:spLocks xmlns:a="http://schemas.openxmlformats.org/drawingml/2006/main" noGrp="1"/>
-          </p:cNvSpPr>
-          <p:nvPr/>
-        </p:nvSpPr>
-        <p:spPr>
-          <a:xfrm xmlns:a="http://schemas.openxmlformats.org/drawingml/2006/main" flipV="0">
-            <a:off x="7747000" y="2857500"/>
-            <a:ext cx="3302000" cy="857250"/>
-          </a:xfrm>
-          <a:prstGeom xmlns:a="http://schemas.openxmlformats.org/drawingml/2006/main" prst="line">
-            <a:avLst/>
-          </a:prstGeom>
-          <a:noFill xmlns:a="http://schemas.openxmlformats.org/drawingml/2006/main"/>
-          <a:ln xmlns:a="http://schemas.openxmlformats.org/drawingml/2006/main" w="171450">
-            <a:solidFill>
-              <a:srgbClr val="1677C8"/>
-            </a:solidFill>
-            <a:prstDash val="solid"/>
-          </a:ln>
-        </p:spPr>
-      </p:sp>
-      <p:sp>
-        <p:nvSpPr>
-          <p:cNvPr id="8" name="">
-            <a:extLst xmlns:a="http://schemas.openxmlformats.org/drawingml/2006/main">
-              <a:ext uri="{FF2B5EF4-FFF2-40B4-BE49-F238E27FC236}">
-                <a16:creationId xmlns:a16="http://schemas.microsoft.com/office/drawing/2014/main" id="{339C9EE7-7215-425A-99B9-D2C090254E01}"/>
-              </a:ext>
-            </a:extLst>
-          </p:cNvPr>
-          <p:cNvSpPr>
-            <a:spLocks xmlns:a="http://schemas.openxmlformats.org/drawingml/2006/main" noGrp="1"/>
-          </p:cNvSpPr>
-          <p:nvPr/>
-        </p:nvSpPr>
-        <p:spPr>
-          <a:xfrm xmlns:a="http://schemas.openxmlformats.org/drawingml/2006/main" flipV="1">
-            <a:off x="7747000" y="2857500"/>
-            <a:ext cx="3302000" cy="857250"/>
-          </a:xfrm>
-          <a:prstGeom xmlns:a="http://schemas.openxmlformats.org/drawingml/2006/main" prst="line">
-            <a:avLst/>
-          </a:prstGeom>
-          <a:noFill xmlns:a="http://schemas.openxmlformats.org/drawingml/2006/main"/>
-          <a:ln xmlns:a="http://schemas.openxmlformats.org/drawingml/2006/main" w="171450">
-            <a:solidFill>
-              <a:srgbClr val="00A8D8"/>
-            </a:solidFill>
-            <a:prstDash val="solid"/>
-          </a:ln>
-        </p:spPr>
-      </p:sp>
-      <p:sp>
-        <p:nvSpPr>
-          <p:cNvPr id="9" name="">
-            <a:extLst xmlns:a="http://schemas.openxmlformats.org/drawingml/2006/main">
-              <a:ext uri="{FF2B5EF4-FFF2-40B4-BE49-F238E27FC236}">
-                <a16:creationId xmlns:a16="http://schemas.microsoft.com/office/drawing/2014/main" id="{EA58FFD7-8D71-4252-A428-BD2126D28DF7}"/>
-              </a:ext>
-            </a:extLst>
-          </p:cNvPr>
-          <p:cNvSpPr>
-            <a:spLocks xmlns:a="http://schemas.openxmlformats.org/drawingml/2006/main" noGrp="1"/>
-          </p:cNvSpPr>
-          <p:nvPr/>
-        </p:nvSpPr>
-        <p:spPr>
-          <a:xfrm xmlns:a="http://schemas.openxmlformats.org/drawingml/2006/main">
-            <a:off x="685800" y="2609850"/>
-            <a:ext cx="1047750" cy="323850"/>
-          </a:xfrm>
-          <a:prstGeom xmlns:a="http://schemas.openxmlformats.org/drawingml/2006/main" prst="roundRect">
-            <a:avLst>
-              <a:gd name="adj" fmla="val 35294"/>
-            </a:avLst>
-          </a:prstGeom>
-          <a:solidFill xmlns:a="http://schemas.openxmlformats.org/drawingml/2006/main">
-            <a:srgbClr val="1677C8"/>
-          </a:solidFill>
-          <a:ln xmlns:a="http://schemas.openxmlformats.org/drawingml/2006/main" w="0">
-            <a:noFill/>
-            <a:prstDash val="solid"/>
-          </a:ln>
-        </p:spPr>
+        <p:style>
+          <a:lnRef xmlns:a="http://schemas.openxmlformats.org/drawingml/2006/main" idx="0"/>
+          <a:fillRef xmlns:a="http://schemas.openxmlformats.org/drawingml/2006/main" idx="0"/>
+          <a:effectRef xmlns:a="http://schemas.openxmlformats.org/drawingml/2006/main" idx="6"/>
+          <a:fontRef xmlns:a="http://schemas.openxmlformats.org/drawingml/2006/main" idx="major"/>
+        </p:style>
         <p:txBody>
-          <a:bodyPr xmlns:a="http://schemas.openxmlformats.org/drawingml/2006/main" lIns="57150" tIns="19050" rIns="57150" bIns="19050" anchor="ctr">
+          <a:bodyPr xmlns:a="http://schemas.openxmlformats.org/drawingml/2006/main" lIns="114300" tIns="76200" rIns="114300" bIns="76200" anchor="ctr">
             <a:normAutofit fontScale="100000"/>
           </a:bodyPr>
           <a:lstStyle xmlns:a="http://schemas.openxmlformats.org/drawingml/2006/main"/>
           <a:p xmlns:a="http://schemas.openxmlformats.org/drawingml/2006/main">
             <a:pPr algn="ctr">
-              <a:defRPr sz="1125" b="1">
-                <a:solidFill>
-                  <a:srgbClr val="FFFFFF"/>
+              <a:defRPr sz="1425" b="1">
+                <a:solidFill>
+                  <a:srgbClr val="1677C8"/>
                 </a:solidFill>
                 <a:latin typeface="Microsoft YaHei"/>
                 <a:ea typeface="Microsoft YaHei"/>
@@ -1403,7 +1254,189 @@
               </a:defRPr>
             </a:pPr>
             <a:r>
-              <a:rPr sz="1125" b="1">
+              <a:rPr sz="1425" b="1">
+                <a:solidFill>
+                  <a:srgbClr val="1677C8"/>
+                </a:solidFill>
+                <a:latin typeface="Microsoft YaHei"/>
+                <a:ea typeface="Microsoft YaHei"/>
+                <a:cs typeface="Microsoft YaHei"/>
+              </a:rPr>
+              <a:t>共同起点</a:t>
+            </a:r>
+          </a:p>
+        </p:txBody>
+      </p:sp>
+      <p:sp>
+        <p:nvSpPr>
+          <p:cNvPr id="5" name="PPAGENT_CONNECTOR|from=dual-track-start|fromSide=right|to=dual-track-lane-a|toSide=left">
+            <a:extLst xmlns:a="http://schemas.openxmlformats.org/drawingml/2006/main">
+              <a:ext uri="{FF2B5EF4-FFF2-40B4-BE49-F238E27FC236}">
+                <a16:creationId xmlns:a16="http://schemas.microsoft.com/office/drawing/2014/main" id="{D42856ED-E060-4311-817E-D4E84B2AD02F}"/>
+              </a:ext>
+            </a:extLst>
+          </p:cNvPr>
+          <p:cNvSpPr>
+            <a:spLocks xmlns:a="http://schemas.openxmlformats.org/drawingml/2006/main" noGrp="1"/>
+          </p:cNvSpPr>
+          <p:nvPr/>
+        </p:nvSpPr>
+        <p:spPr>
+          <a:xfrm xmlns:a="http://schemas.openxmlformats.org/drawingml/2006/main" flipH="0" flipV="1">
+            <a:off x="1924050" y="3009900"/>
+            <a:ext cx="552450" cy="904875"/>
+          </a:xfrm>
+          <a:prstGeom xmlns:a="http://schemas.openxmlformats.org/drawingml/2006/main" prst="line">
+            <a:avLst/>
+          </a:prstGeom>
+          <a:noFill xmlns:a="http://schemas.openxmlformats.org/drawingml/2006/main"/>
+          <a:ln xmlns:a="http://schemas.openxmlformats.org/drawingml/2006/main" w="28575">
+            <a:solidFill>
+              <a:srgbClr val="1677C8"/>
+            </a:solidFill>
+            <a:prstDash val="solid"/>
+          </a:ln>
+        </p:spPr>
+      </p:sp>
+      <p:sp>
+        <p:nvSpPr>
+          <p:cNvPr id="6" name="PPAGENT_CONNECTOR|from=dual-track-start|fromSide=right|to=dual-track-lane-b|toSide=left">
+            <a:extLst xmlns:a="http://schemas.openxmlformats.org/drawingml/2006/main">
+              <a:ext uri="{FF2B5EF4-FFF2-40B4-BE49-F238E27FC236}">
+                <a16:creationId xmlns:a16="http://schemas.microsoft.com/office/drawing/2014/main" id="{5E4F0A4B-3140-45D6-AED0-66E77F7401DE}"/>
+              </a:ext>
+            </a:extLst>
+          </p:cNvPr>
+          <p:cNvSpPr>
+            <a:spLocks xmlns:a="http://schemas.openxmlformats.org/drawingml/2006/main" noGrp="1"/>
+          </p:cNvSpPr>
+          <p:nvPr/>
+        </p:nvSpPr>
+        <p:spPr>
+          <a:xfrm xmlns:a="http://schemas.openxmlformats.org/drawingml/2006/main" flipH="0" flipV="0">
+            <a:off x="1924050" y="3914775"/>
+            <a:ext cx="552450" cy="904875"/>
+          </a:xfrm>
+          <a:prstGeom xmlns:a="http://schemas.openxmlformats.org/drawingml/2006/main" prst="line">
+            <a:avLst/>
+          </a:prstGeom>
+          <a:noFill xmlns:a="http://schemas.openxmlformats.org/drawingml/2006/main"/>
+          <a:ln xmlns:a="http://schemas.openxmlformats.org/drawingml/2006/main" w="28575">
+            <a:solidFill>
+              <a:srgbClr val="00A8D8"/>
+            </a:solidFill>
+            <a:prstDash val="solid"/>
+          </a:ln>
+        </p:spPr>
+      </p:sp>
+      <p:sp>
+        <p:nvSpPr>
+          <p:cNvPr id="7" name="PPAGENT_QA|parent=dual-track-lane-a">
+            <a:extLst xmlns:a="http://schemas.openxmlformats.org/drawingml/2006/main">
+              <a:ext uri="{FF2B5EF4-FFF2-40B4-BE49-F238E27FC236}">
+                <a16:creationId xmlns:a16="http://schemas.microsoft.com/office/drawing/2014/main" id="{DFB47007-2055-4E12-81F3-1BD86D6C8EBB}"/>
+              </a:ext>
+            </a:extLst>
+          </p:cNvPr>
+          <p:cNvSpPr>
+            <a:spLocks xmlns:a="http://schemas.openxmlformats.org/drawingml/2006/main" noGrp="1"/>
+          </p:cNvSpPr>
+          <p:nvPr/>
+        </p:nvSpPr>
+        <p:spPr>
+          <a:xfrm xmlns:a="http://schemas.openxmlformats.org/drawingml/2006/main">
+            <a:off x="2476500" y="2628900"/>
+            <a:ext cx="9048750" cy="762000"/>
+          </a:xfrm>
+          <a:prstGeom xmlns:a="http://schemas.openxmlformats.org/drawingml/2006/main" prst="rightArrow">
+            <a:avLst/>
+          </a:prstGeom>
+          <a:solidFill xmlns:a="http://schemas.openxmlformats.org/drawingml/2006/main">
+            <a:srgbClr val="1677C8"/>
+          </a:solidFill>
+          <a:ln xmlns:a="http://schemas.openxmlformats.org/drawingml/2006/main" w="0">
+            <a:noFill/>
+            <a:prstDash val="solid"/>
+          </a:ln>
+        </p:spPr>
+      </p:sp>
+      <p:sp>
+        <p:nvSpPr>
+          <p:cNvPr id="8" name="PPAGENT_QA|parent=dual-track-lane-b">
+            <a:extLst xmlns:a="http://schemas.openxmlformats.org/drawingml/2006/main">
+              <a:ext uri="{FF2B5EF4-FFF2-40B4-BE49-F238E27FC236}">
+                <a16:creationId xmlns:a16="http://schemas.microsoft.com/office/drawing/2014/main" id="{81BB7240-3672-43ED-B7A4-2157C8632CAF}"/>
+              </a:ext>
+            </a:extLst>
+          </p:cNvPr>
+          <p:cNvSpPr>
+            <a:spLocks xmlns:a="http://schemas.openxmlformats.org/drawingml/2006/main" noGrp="1"/>
+          </p:cNvSpPr>
+          <p:nvPr/>
+        </p:nvSpPr>
+        <p:spPr>
+          <a:xfrm xmlns:a="http://schemas.openxmlformats.org/drawingml/2006/main">
+            <a:off x="2476500" y="4438650"/>
+            <a:ext cx="9048750" cy="762000"/>
+          </a:xfrm>
+          <a:prstGeom xmlns:a="http://schemas.openxmlformats.org/drawingml/2006/main" prst="rightArrow">
+            <a:avLst/>
+          </a:prstGeom>
+          <a:solidFill xmlns:a="http://schemas.openxmlformats.org/drawingml/2006/main">
+            <a:srgbClr val="5D91CD"/>
+          </a:solidFill>
+          <a:ln xmlns:a="http://schemas.openxmlformats.org/drawingml/2006/main" w="0">
+            <a:noFill/>
+            <a:prstDash val="solid"/>
+          </a:ln>
+        </p:spPr>
+      </p:sp>
+      <p:sp>
+        <p:nvSpPr>
+          <p:cNvPr id="9" name="">
+            <a:extLst xmlns:a="http://schemas.openxmlformats.org/drawingml/2006/main">
+              <a:ext uri="{FF2B5EF4-FFF2-40B4-BE49-F238E27FC236}">
+                <a16:creationId xmlns:a16="http://schemas.microsoft.com/office/drawing/2014/main" id="{FF20ECE9-666E-4A6A-826B-0EFA40DB3AB4}"/>
+              </a:ext>
+            </a:extLst>
+          </p:cNvPr>
+          <p:cNvSpPr>
+            <a:spLocks xmlns:a="http://schemas.openxmlformats.org/drawingml/2006/main" noGrp="1"/>
+          </p:cNvSpPr>
+          <p:nvPr/>
+        </p:nvSpPr>
+        <p:spPr>
+          <a:xfrm xmlns:a="http://schemas.openxmlformats.org/drawingml/2006/main">
+            <a:off x="2647950" y="2819400"/>
+            <a:ext cx="1143000" cy="381000"/>
+          </a:xfrm>
+          <a:prstGeom xmlns:a="http://schemas.openxmlformats.org/drawingml/2006/main" prst="rect">
+            <a:avLst/>
+          </a:prstGeom>
+          <a:noFill xmlns:a="http://schemas.openxmlformats.org/drawingml/2006/main"/>
+          <a:ln xmlns:a="http://schemas.openxmlformats.org/drawingml/2006/main" w="0">
+            <a:noFill/>
+            <a:prstDash val="solid"/>
+          </a:ln>
+        </p:spPr>
+        <p:txBody>
+          <a:bodyPr xmlns:a="http://schemas.openxmlformats.org/drawingml/2006/main" lIns="0" tIns="0" rIns="0" bIns="0" anchor="ctr">
+            <a:normAutofit fontScale="100000"/>
+          </a:bodyPr>
+          <a:lstStyle xmlns:a="http://schemas.openxmlformats.org/drawingml/2006/main"/>
+          <a:p xmlns:a="http://schemas.openxmlformats.org/drawingml/2006/main">
+            <a:pPr algn="ctr">
+              <a:defRPr sz="1350" b="1">
+                <a:solidFill>
+                  <a:srgbClr val="FFFFFF"/>
+                </a:solidFill>
+                <a:latin typeface="Microsoft YaHei"/>
+                <a:ea typeface="Microsoft YaHei"/>
+                <a:cs typeface="Microsoft YaHei"/>
+              </a:defRPr>
+            </a:pPr>
+            <a:r>
+              <a:rPr sz="1350" b="1">
                 <a:solidFill>
                   <a:srgbClr val="FFFFFF"/>
                 </a:solidFill>
@@ -1421,41 +1454,37 @@
           <p:cNvPr id="10" name="">
             <a:extLst xmlns:a="http://schemas.openxmlformats.org/drawingml/2006/main">
               <a:ext uri="{FF2B5EF4-FFF2-40B4-BE49-F238E27FC236}">
-                <a16:creationId xmlns:a16="http://schemas.microsoft.com/office/drawing/2014/main" id="{DB525A28-B0F3-48E4-87DA-FB286021250A}"/>
-              </a:ext>
-            </a:extLst>
-          </p:cNvPr>
-          <p:cNvSpPr>
-            <a:spLocks xmlns:a="http://schemas.openxmlformats.org/drawingml/2006/main" noGrp="1"/>
-          </p:cNvSpPr>
-          <p:nvPr/>
-        </p:nvSpPr>
-        <p:spPr>
-          <a:xfrm xmlns:a="http://schemas.openxmlformats.org/drawingml/2006/main">
-            <a:off x="685800" y="3876675"/>
-            <a:ext cx="1047750" cy="323850"/>
-          </a:xfrm>
-          <a:prstGeom xmlns:a="http://schemas.openxmlformats.org/drawingml/2006/main" prst="roundRect">
-            <a:avLst>
-              <a:gd name="adj" fmla="val 35294"/>
-            </a:avLst>
-          </a:prstGeom>
-          <a:solidFill xmlns:a="http://schemas.openxmlformats.org/drawingml/2006/main">
-            <a:srgbClr val="00A8D8"/>
-          </a:solidFill>
+                <a16:creationId xmlns:a16="http://schemas.microsoft.com/office/drawing/2014/main" id="{97C4F81E-46BE-4CE0-9F80-045CAD6A6DCA}"/>
+              </a:ext>
+            </a:extLst>
+          </p:cNvPr>
+          <p:cNvSpPr>
+            <a:spLocks xmlns:a="http://schemas.openxmlformats.org/drawingml/2006/main" noGrp="1"/>
+          </p:cNvSpPr>
+          <p:nvPr/>
+        </p:nvSpPr>
+        <p:spPr>
+          <a:xfrm xmlns:a="http://schemas.openxmlformats.org/drawingml/2006/main">
+            <a:off x="2647950" y="4629150"/>
+            <a:ext cx="1143000" cy="381000"/>
+          </a:xfrm>
+          <a:prstGeom xmlns:a="http://schemas.openxmlformats.org/drawingml/2006/main" prst="rect">
+            <a:avLst/>
+          </a:prstGeom>
+          <a:noFill xmlns:a="http://schemas.openxmlformats.org/drawingml/2006/main"/>
           <a:ln xmlns:a="http://schemas.openxmlformats.org/drawingml/2006/main" w="0">
             <a:noFill/>
             <a:prstDash val="solid"/>
           </a:ln>
         </p:spPr>
         <p:txBody>
-          <a:bodyPr xmlns:a="http://schemas.openxmlformats.org/drawingml/2006/main" lIns="57150" tIns="19050" rIns="57150" bIns="19050" anchor="ctr">
+          <a:bodyPr xmlns:a="http://schemas.openxmlformats.org/drawingml/2006/main" lIns="0" tIns="0" rIns="0" bIns="0" anchor="ctr">
             <a:normAutofit fontScale="100000"/>
           </a:bodyPr>
           <a:lstStyle xmlns:a="http://schemas.openxmlformats.org/drawingml/2006/main"/>
           <a:p xmlns:a="http://schemas.openxmlformats.org/drawingml/2006/main">
             <a:pPr algn="ctr">
-              <a:defRPr sz="1125" b="1">
+              <a:defRPr sz="1350" b="1">
                 <a:solidFill>
                   <a:srgbClr val="FFFFFF"/>
                 </a:solidFill>
@@ -1465,7 +1494,7 @@
               </a:defRPr>
             </a:pPr>
             <a:r>
-              <a:rPr sz="1125" b="1">
+              <a:rPr sz="1350" b="1">
                 <a:solidFill>
                   <a:srgbClr val="FFFFFF"/>
                 </a:solidFill>
@@ -1483,27 +1512,27 @@
           <p:cNvPr id="11" name="">
             <a:extLst xmlns:a="http://schemas.openxmlformats.org/drawingml/2006/main">
               <a:ext uri="{FF2B5EF4-FFF2-40B4-BE49-F238E27FC236}">
-                <a16:creationId xmlns:a16="http://schemas.microsoft.com/office/drawing/2014/main" id="{D631C330-A391-4341-AF14-3C6E6D368913}"/>
-              </a:ext>
-            </a:extLst>
-          </p:cNvPr>
-          <p:cNvSpPr>
-            <a:spLocks xmlns:a="http://schemas.openxmlformats.org/drawingml/2006/main" noGrp="1"/>
-          </p:cNvSpPr>
-          <p:nvPr/>
-        </p:nvSpPr>
-        <p:spPr>
-          <a:xfrm xmlns:a="http://schemas.openxmlformats.org/drawingml/2006/main" flipV="1">
-            <a:off x="1143000" y="2495550"/>
-            <a:ext cx="0" cy="1219200"/>
+                <a16:creationId xmlns:a16="http://schemas.microsoft.com/office/drawing/2014/main" id="{788A4D80-665D-4714-8533-8B62DBEEF001}"/>
+              </a:ext>
+            </a:extLst>
+          </p:cNvPr>
+          <p:cNvSpPr>
+            <a:spLocks xmlns:a="http://schemas.openxmlformats.org/drawingml/2006/main" noGrp="1"/>
+          </p:cNvSpPr>
+          <p:nvPr/>
+        </p:nvSpPr>
+        <p:spPr>
+          <a:xfrm xmlns:a="http://schemas.openxmlformats.org/drawingml/2006/main" flipH="0" flipV="0">
+            <a:off x="4267200" y="2552700"/>
+            <a:ext cx="0" cy="2724150"/>
           </a:xfrm>
           <a:prstGeom xmlns:a="http://schemas.openxmlformats.org/drawingml/2006/main" prst="line">
             <a:avLst/>
           </a:prstGeom>
           <a:noFill xmlns:a="http://schemas.openxmlformats.org/drawingml/2006/main"/>
-          <a:ln xmlns:a="http://schemas.openxmlformats.org/drawingml/2006/main" w="14288">
+          <a:ln xmlns:a="http://schemas.openxmlformats.org/drawingml/2006/main" w="9525">
             <a:solidFill>
-              <a:srgbClr val="C9D5E3"/>
+              <a:srgbClr val="C2CEDB"/>
             </a:solidFill>
             <a:prstDash val="solid"/>
           </a:ln>
@@ -1514,29 +1543,27 @@
           <p:cNvPr id="12" name="">
             <a:extLst xmlns:a="http://schemas.openxmlformats.org/drawingml/2006/main">
               <a:ext uri="{FF2B5EF4-FFF2-40B4-BE49-F238E27FC236}">
-                <a16:creationId xmlns:a16="http://schemas.microsoft.com/office/drawing/2014/main" id="{5ACDC826-0262-40E8-8432-30CCE3D61FBC}"/>
-              </a:ext>
-            </a:extLst>
-          </p:cNvPr>
-          <p:cNvSpPr>
-            <a:spLocks xmlns:a="http://schemas.openxmlformats.org/drawingml/2006/main" noGrp="1"/>
-          </p:cNvSpPr>
-          <p:nvPr/>
-        </p:nvSpPr>
-        <p:spPr>
-          <a:xfrm xmlns:a="http://schemas.openxmlformats.org/drawingml/2006/main">
-            <a:off x="457200" y="1295400"/>
-            <a:ext cx="2133600" cy="1200150"/>
-          </a:xfrm>
-          <a:prstGeom xmlns:a="http://schemas.openxmlformats.org/drawingml/2006/main" prst="roundRect">
-            <a:avLst>
-              <a:gd name="adj" fmla="val 9524"/>
-            </a:avLst>
+                <a16:creationId xmlns:a16="http://schemas.microsoft.com/office/drawing/2014/main" id="{6E9BD34E-B931-4EA2-A043-94053E0F2981}"/>
+              </a:ext>
+            </a:extLst>
+          </p:cNvPr>
+          <p:cNvSpPr>
+            <a:spLocks xmlns:a="http://schemas.openxmlformats.org/drawingml/2006/main" noGrp="1"/>
+          </p:cNvSpPr>
+          <p:nvPr/>
+        </p:nvSpPr>
+        <p:spPr>
+          <a:xfrm xmlns:a="http://schemas.openxmlformats.org/drawingml/2006/main">
+            <a:off x="4057650" y="2800350"/>
+            <a:ext cx="419100" cy="419100"/>
+          </a:xfrm>
+          <a:prstGeom xmlns:a="http://schemas.openxmlformats.org/drawingml/2006/main" prst="ellipse">
+            <a:avLst/>
           </a:prstGeom>
           <a:solidFill xmlns:a="http://schemas.openxmlformats.org/drawingml/2006/main">
             <a:srgbClr val="FFFFFF"/>
           </a:solidFill>
-          <a:ln xmlns:a="http://schemas.openxmlformats.org/drawingml/2006/main" w="14288">
+          <a:ln xmlns:a="http://schemas.openxmlformats.org/drawingml/2006/main" w="28575">
             <a:solidFill>
               <a:srgbClr val="1677C8"/>
             </a:solidFill>
@@ -1549,45 +1576,16 @@
           <a:effectRef xmlns:a="http://schemas.openxmlformats.org/drawingml/2006/main" idx="4"/>
           <a:fontRef xmlns:a="http://schemas.openxmlformats.org/drawingml/2006/main" idx="major"/>
         </p:style>
-      </p:sp>
-      <p:sp>
-        <p:nvSpPr>
-          <p:cNvPr id="13" name="">
-            <a:extLst xmlns:a="http://schemas.openxmlformats.org/drawingml/2006/main">
-              <a:ext uri="{FF2B5EF4-FFF2-40B4-BE49-F238E27FC236}">
-                <a16:creationId xmlns:a16="http://schemas.microsoft.com/office/drawing/2014/main" id="{CAEBF4BA-14E9-44C4-BA64-9D027BDCB2FF}"/>
-              </a:ext>
-            </a:extLst>
-          </p:cNvPr>
-          <p:cNvSpPr>
-            <a:spLocks xmlns:a="http://schemas.openxmlformats.org/drawingml/2006/main" noGrp="1"/>
-          </p:cNvSpPr>
-          <p:nvPr/>
-        </p:nvSpPr>
-        <p:spPr>
-          <a:xfrm xmlns:a="http://schemas.openxmlformats.org/drawingml/2006/main">
-            <a:off x="590550" y="1409700"/>
-            <a:ext cx="1866900" cy="228600"/>
-          </a:xfrm>
-          <a:prstGeom xmlns:a="http://schemas.openxmlformats.org/drawingml/2006/main" prst="rect">
-            <a:avLst/>
-          </a:prstGeom>
-          <a:noFill xmlns:a="http://schemas.openxmlformats.org/drawingml/2006/main"/>
-          <a:ln xmlns:a="http://schemas.openxmlformats.org/drawingml/2006/main" w="0">
-            <a:noFill/>
-            <a:prstDash val="solid"/>
-          </a:ln>
-        </p:spPr>
         <p:txBody>
           <a:bodyPr xmlns:a="http://schemas.openxmlformats.org/drawingml/2006/main" lIns="0" tIns="0" rIns="0" bIns="0" anchor="ctr">
             <a:normAutofit fontScale="100000"/>
           </a:bodyPr>
           <a:lstStyle xmlns:a="http://schemas.openxmlformats.org/drawingml/2006/main"/>
           <a:p xmlns:a="http://schemas.openxmlformats.org/drawingml/2006/main">
-            <a:pPr algn="l">
-              <a:defRPr sz="1125" b="1">
-                <a:solidFill>
-                  <a:srgbClr val="E9A62E"/>
+            <a:pPr algn="ctr">
+              <a:defRPr sz="1200" b="1">
+                <a:solidFill>
+                  <a:srgbClr val="1677C8"/>
                 </a:solidFill>
                 <a:latin typeface="Microsoft YaHei"/>
                 <a:ea typeface="Microsoft YaHei"/>
@@ -1595,57 +1593,67 @@
               </a:defRPr>
             </a:pPr>
             <a:r>
-              <a:rPr sz="1125" b="1">
-                <a:solidFill>
-                  <a:srgbClr val="E9A62E"/>
+              <a:rPr sz="1200" b="1">
+                <a:solidFill>
+                  <a:srgbClr val="1677C8"/>
                 </a:solidFill>
                 <a:latin typeface="Microsoft YaHei"/>
                 <a:ea typeface="Microsoft YaHei"/>
                 <a:cs typeface="Microsoft YaHei"/>
               </a:rPr>
-              <a:t>2021</a:t>
+              <a:t>01</a:t>
             </a:r>
           </a:p>
         </p:txBody>
       </p:sp>
       <p:sp>
         <p:nvSpPr>
-          <p:cNvPr id="14" name="">
-            <a:extLst xmlns:a="http://schemas.openxmlformats.org/drawingml/2006/main">
-              <a:ext uri="{FF2B5EF4-FFF2-40B4-BE49-F238E27FC236}">
-                <a16:creationId xmlns:a16="http://schemas.microsoft.com/office/drawing/2014/main" id="{692D4544-40BF-4C62-A20F-8A0884F099D6}"/>
-              </a:ext>
-            </a:extLst>
-          </p:cNvPr>
-          <p:cNvSpPr>
-            <a:spLocks xmlns:a="http://schemas.openxmlformats.org/drawingml/2006/main" noGrp="1"/>
-          </p:cNvSpPr>
-          <p:nvPr/>
-        </p:nvSpPr>
-        <p:spPr>
-          <a:xfrm xmlns:a="http://schemas.openxmlformats.org/drawingml/2006/main">
-            <a:off x="590550" y="1657350"/>
-            <a:ext cx="1866900" cy="304800"/>
-          </a:xfrm>
-          <a:prstGeom xmlns:a="http://schemas.openxmlformats.org/drawingml/2006/main" prst="rect">
-            <a:avLst/>
-          </a:prstGeom>
-          <a:noFill xmlns:a="http://schemas.openxmlformats.org/drawingml/2006/main"/>
-          <a:ln xmlns:a="http://schemas.openxmlformats.org/drawingml/2006/main" w="0">
-            <a:noFill/>
-            <a:prstDash val="solid"/>
-          </a:ln>
-        </p:spPr>
+          <p:cNvPr id="13" name="">
+            <a:extLst xmlns:a="http://schemas.openxmlformats.org/drawingml/2006/main">
+              <a:ext uri="{FF2B5EF4-FFF2-40B4-BE49-F238E27FC236}">
+                <a16:creationId xmlns:a16="http://schemas.microsoft.com/office/drawing/2014/main" id="{D8C7762B-3076-41A4-ACDC-00FC26A349DA}"/>
+              </a:ext>
+            </a:extLst>
+          </p:cNvPr>
+          <p:cNvSpPr>
+            <a:spLocks xmlns:a="http://schemas.openxmlformats.org/drawingml/2006/main" noGrp="1"/>
+          </p:cNvSpPr>
+          <p:nvPr/>
+        </p:nvSpPr>
+        <p:spPr>
+          <a:xfrm xmlns:a="http://schemas.openxmlformats.org/drawingml/2006/main">
+            <a:off x="4057650" y="4610100"/>
+            <a:ext cx="419100" cy="419100"/>
+          </a:xfrm>
+          <a:prstGeom xmlns:a="http://schemas.openxmlformats.org/drawingml/2006/main" prst="ellipse">
+            <a:avLst/>
+          </a:prstGeom>
+          <a:solidFill xmlns:a="http://schemas.openxmlformats.org/drawingml/2006/main">
+            <a:srgbClr val="FFFFFF"/>
+          </a:solidFill>
+          <a:ln xmlns:a="http://schemas.openxmlformats.org/drawingml/2006/main" w="28575">
+            <a:solidFill>
+              <a:srgbClr val="00A8D8"/>
+            </a:solidFill>
+            <a:prstDash val="solid"/>
+          </a:ln>
+        </p:spPr>
+        <p:style>
+          <a:lnRef xmlns:a="http://schemas.openxmlformats.org/drawingml/2006/main" idx="0"/>
+          <a:fillRef xmlns:a="http://schemas.openxmlformats.org/drawingml/2006/main" idx="0"/>
+          <a:effectRef xmlns:a="http://schemas.openxmlformats.org/drawingml/2006/main" idx="4"/>
+          <a:fontRef xmlns:a="http://schemas.openxmlformats.org/drawingml/2006/main" idx="major"/>
+        </p:style>
         <p:txBody>
           <a:bodyPr xmlns:a="http://schemas.openxmlformats.org/drawingml/2006/main" lIns="0" tIns="0" rIns="0" bIns="0" anchor="ctr">
             <a:normAutofit fontScale="100000"/>
           </a:bodyPr>
           <a:lstStyle xmlns:a="http://schemas.openxmlformats.org/drawingml/2006/main"/>
           <a:p xmlns:a="http://schemas.openxmlformats.org/drawingml/2006/main">
-            <a:pPr algn="l">
-              <a:defRPr sz="1425" b="1">
-                <a:solidFill>
-                  <a:srgbClr val="1677C8"/>
+            <a:pPr algn="ctr">
+              <a:defRPr sz="1200" b="1">
+                <a:solidFill>
+                  <a:srgbClr val="00A8D8"/>
                 </a:solidFill>
                 <a:latin typeface="Microsoft YaHei"/>
                 <a:ea typeface="Microsoft YaHei"/>
@@ -1653,171 +1661,49 @@
               </a:defRPr>
             </a:pPr>
             <a:r>
-              <a:rPr sz="1425" b="1">
-                <a:solidFill>
-                  <a:srgbClr val="1677C8"/>
+              <a:rPr sz="1200" b="1">
+                <a:solidFill>
+                  <a:srgbClr val="00A8D8"/>
                 </a:solidFill>
                 <a:latin typeface="Microsoft YaHei"/>
                 <a:ea typeface="Microsoft YaHei"/>
                 <a:cs typeface="Microsoft YaHei"/>
               </a:rPr>
-              <a:t>能力起步</a:t>
+              <a:t>01</a:t>
             </a:r>
           </a:p>
         </p:txBody>
       </p:sp>
       <p:sp>
         <p:nvSpPr>
-          <p:cNvPr id="15" name="">
-            <a:extLst xmlns:a="http://schemas.openxmlformats.org/drawingml/2006/main">
-              <a:ext uri="{FF2B5EF4-FFF2-40B4-BE49-F238E27FC236}">
-                <a16:creationId xmlns:a16="http://schemas.microsoft.com/office/drawing/2014/main" id="{7C987A34-EEB7-4298-A7EB-B66960FEC3D8}"/>
-              </a:ext>
-            </a:extLst>
-          </p:cNvPr>
-          <p:cNvSpPr>
-            <a:spLocks xmlns:a="http://schemas.openxmlformats.org/drawingml/2006/main" noGrp="1"/>
-          </p:cNvSpPr>
-          <p:nvPr/>
-        </p:nvSpPr>
-        <p:spPr>
-          <a:xfrm xmlns:a="http://schemas.openxmlformats.org/drawingml/2006/main">
-            <a:off x="590550" y="1981200"/>
-            <a:ext cx="1866900" cy="400050"/>
-          </a:xfrm>
-          <a:prstGeom xmlns:a="http://schemas.openxmlformats.org/drawingml/2006/main" prst="rect">
-            <a:avLst/>
-          </a:prstGeom>
-          <a:noFill xmlns:a="http://schemas.openxmlformats.org/drawingml/2006/main"/>
-          <a:ln xmlns:a="http://schemas.openxmlformats.org/drawingml/2006/main" w="0">
-            <a:noFill/>
-            <a:prstDash val="solid"/>
-          </a:ln>
-        </p:spPr>
-        <p:txBody>
-          <a:bodyPr xmlns:a="http://schemas.openxmlformats.org/drawingml/2006/main" lIns="0" tIns="0" rIns="0" bIns="0" anchor="t">
-            <a:normAutofit fontScale="100000"/>
-          </a:bodyPr>
-          <a:lstStyle xmlns:a="http://schemas.openxmlformats.org/drawingml/2006/main"/>
-          <a:p xmlns:a="http://schemas.openxmlformats.org/drawingml/2006/main">
-            <a:pPr algn="l">
-              <a:defRPr sz="975" b="0">
-                <a:solidFill>
-                  <a:srgbClr val="475569"/>
-                </a:solidFill>
-                <a:latin typeface="Microsoft YaHei"/>
-                <a:ea typeface="Microsoft YaHei"/>
-                <a:cs typeface="Microsoft YaHei"/>
-              </a:defRPr>
-            </a:pPr>
-            <a:r>
-              <a:rPr sz="975" b="0">
-                <a:solidFill>
-                  <a:srgbClr val="475569"/>
-                </a:solidFill>
-                <a:latin typeface="Microsoft YaHei"/>
-                <a:ea typeface="Microsoft YaHei"/>
-                <a:cs typeface="Microsoft YaHei"/>
-              </a:rPr>
-              <a:t>建立基础服务并完成首个场景</a:t>
-            </a:r>
-          </a:p>
-        </p:txBody>
-      </p:sp>
-      <p:sp>
-        <p:nvSpPr>
-          <p:cNvPr id="16" name="">
-            <a:extLst xmlns:a="http://schemas.openxmlformats.org/drawingml/2006/main">
-              <a:ext uri="{FF2B5EF4-FFF2-40B4-BE49-F238E27FC236}">
-                <a16:creationId xmlns:a16="http://schemas.microsoft.com/office/drawing/2014/main" id="{FA7A0276-EEC4-4A01-96FC-47CF6B6DD14D}"/>
-              </a:ext>
-            </a:extLst>
-          </p:cNvPr>
-          <p:cNvSpPr>
-            <a:spLocks xmlns:a="http://schemas.openxmlformats.org/drawingml/2006/main" noGrp="1"/>
-          </p:cNvSpPr>
-          <p:nvPr/>
-        </p:nvSpPr>
-        <p:spPr>
-          <a:xfrm xmlns:a="http://schemas.openxmlformats.org/drawingml/2006/main">
-            <a:off x="1066800" y="3638550"/>
-            <a:ext cx="152400" cy="152400"/>
-          </a:xfrm>
-          <a:prstGeom xmlns:a="http://schemas.openxmlformats.org/drawingml/2006/main" prst="ellipse">
-            <a:avLst/>
+          <p:cNvPr id="14" name="">
+            <a:extLst xmlns:a="http://schemas.openxmlformats.org/drawingml/2006/main">
+              <a:ext uri="{FF2B5EF4-FFF2-40B4-BE49-F238E27FC236}">
+                <a16:creationId xmlns:a16="http://schemas.microsoft.com/office/drawing/2014/main" id="{3D452966-1878-4FC6-B4C2-1350A76676E9}"/>
+              </a:ext>
+            </a:extLst>
+          </p:cNvPr>
+          <p:cNvSpPr>
+            <a:spLocks xmlns:a="http://schemas.openxmlformats.org/drawingml/2006/main" noGrp="1"/>
+          </p:cNvSpPr>
+          <p:nvPr/>
+        </p:nvSpPr>
+        <p:spPr>
+          <a:xfrm xmlns:a="http://schemas.openxmlformats.org/drawingml/2006/main">
+            <a:off x="3829050" y="3562350"/>
+            <a:ext cx="876300" cy="342900"/>
+          </a:xfrm>
+          <a:prstGeom xmlns:a="http://schemas.openxmlformats.org/drawingml/2006/main" prst="roundRect">
+            <a:avLst>
+              <a:gd name="adj" fmla="val 33333"/>
+            </a:avLst>
           </a:prstGeom>
           <a:solidFill xmlns:a="http://schemas.openxmlformats.org/drawingml/2006/main">
             <a:srgbClr val="FFFFFF"/>
           </a:solidFill>
-          <a:ln xmlns:a="http://schemas.openxmlformats.org/drawingml/2006/main" w="28575">
+          <a:ln xmlns:a="http://schemas.openxmlformats.org/drawingml/2006/main" w="9525">
             <a:solidFill>
-              <a:srgbClr val="00A8D8"/>
-            </a:solidFill>
-            <a:prstDash val="solid"/>
-          </a:ln>
-        </p:spPr>
-      </p:sp>
-      <p:sp>
-        <p:nvSpPr>
-          <p:cNvPr id="17" name="">
-            <a:extLst xmlns:a="http://schemas.openxmlformats.org/drawingml/2006/main">
-              <a:ext uri="{FF2B5EF4-FFF2-40B4-BE49-F238E27FC236}">
-                <a16:creationId xmlns:a16="http://schemas.microsoft.com/office/drawing/2014/main" id="{5051CFB4-E1D8-4E07-AB9E-B02EDB493EC6}"/>
-              </a:ext>
-            </a:extLst>
-          </p:cNvPr>
-          <p:cNvSpPr>
-            <a:spLocks xmlns:a="http://schemas.openxmlformats.org/drawingml/2006/main" noGrp="1"/>
-          </p:cNvSpPr>
-          <p:nvPr/>
-        </p:nvSpPr>
-        <p:spPr>
-          <a:xfrm xmlns:a="http://schemas.openxmlformats.org/drawingml/2006/main" flipV="0">
-            <a:off x="4445000" y="3714750"/>
-            <a:ext cx="0" cy="571500"/>
-          </a:xfrm>
-          <a:prstGeom xmlns:a="http://schemas.openxmlformats.org/drawingml/2006/main" prst="line">
-            <a:avLst/>
-          </a:prstGeom>
-          <a:noFill xmlns:a="http://schemas.openxmlformats.org/drawingml/2006/main"/>
-          <a:ln xmlns:a="http://schemas.openxmlformats.org/drawingml/2006/main" w="14288">
-            <a:solidFill>
-              <a:srgbClr val="C9D5E3"/>
-            </a:solidFill>
-            <a:prstDash val="solid"/>
-          </a:ln>
-        </p:spPr>
-      </p:sp>
-      <p:sp>
-        <p:nvSpPr>
-          <p:cNvPr id="18" name="">
-            <a:extLst xmlns:a="http://schemas.openxmlformats.org/drawingml/2006/main">
-              <a:ext uri="{FF2B5EF4-FFF2-40B4-BE49-F238E27FC236}">
-                <a16:creationId xmlns:a16="http://schemas.microsoft.com/office/drawing/2014/main" id="{07666CD0-2F42-495E-A301-AAB8E285EB2D}"/>
-              </a:ext>
-            </a:extLst>
-          </p:cNvPr>
-          <p:cNvSpPr>
-            <a:spLocks xmlns:a="http://schemas.openxmlformats.org/drawingml/2006/main" noGrp="1"/>
-          </p:cNvSpPr>
-          <p:nvPr/>
-        </p:nvSpPr>
-        <p:spPr>
-          <a:xfrm xmlns:a="http://schemas.openxmlformats.org/drawingml/2006/main">
-            <a:off x="3378200" y="4286250"/>
-            <a:ext cx="2133600" cy="1200150"/>
-          </a:xfrm>
-          <a:prstGeom xmlns:a="http://schemas.openxmlformats.org/drawingml/2006/main" prst="roundRect">
-            <a:avLst>
-              <a:gd name="adj" fmla="val 9524"/>
-            </a:avLst>
-          </a:prstGeom>
-          <a:solidFill xmlns:a="http://schemas.openxmlformats.org/drawingml/2006/main">
-            <a:srgbClr val="FFFFFF"/>
-          </a:solidFill>
-          <a:ln xmlns:a="http://schemas.openxmlformats.org/drawingml/2006/main" w="14288">
-            <a:solidFill>
-              <a:srgbClr val="00A8D8"/>
+              <a:srgbClr val="D6E1EC"/>
             </a:solidFill>
             <a:prstDash val="solid"/>
           </a:ln>
@@ -1828,25 +1714,95 @@
           <a:effectRef xmlns:a="http://schemas.openxmlformats.org/drawingml/2006/main" idx="4"/>
           <a:fontRef xmlns:a="http://schemas.openxmlformats.org/drawingml/2006/main" idx="major"/>
         </p:style>
-      </p:sp>
-      <p:sp>
-        <p:nvSpPr>
-          <p:cNvPr id="19" name="">
-            <a:extLst xmlns:a="http://schemas.openxmlformats.org/drawingml/2006/main">
-              <a:ext uri="{FF2B5EF4-FFF2-40B4-BE49-F238E27FC236}">
-                <a16:creationId xmlns:a16="http://schemas.microsoft.com/office/drawing/2014/main" id="{46DD774F-CB55-452E-9AAC-6B52EDDF9BF3}"/>
-              </a:ext>
-            </a:extLst>
-          </p:cNvPr>
-          <p:cNvSpPr>
-            <a:spLocks xmlns:a="http://schemas.openxmlformats.org/drawingml/2006/main" noGrp="1"/>
-          </p:cNvSpPr>
-          <p:nvPr/>
-        </p:nvSpPr>
-        <p:spPr>
-          <a:xfrm xmlns:a="http://schemas.openxmlformats.org/drawingml/2006/main">
-            <a:off x="3511550" y="4400550"/>
-            <a:ext cx="1866900" cy="228600"/>
+        <p:txBody>
+          <a:bodyPr xmlns:a="http://schemas.openxmlformats.org/drawingml/2006/main" lIns="38100" tIns="9525" rIns="38100" bIns="9525" anchor="ctr">
+            <a:normAutofit fontScale="100000"/>
+          </a:bodyPr>
+          <a:lstStyle xmlns:a="http://schemas.openxmlformats.org/drawingml/2006/main"/>
+          <a:p xmlns:a="http://schemas.openxmlformats.org/drawingml/2006/main">
+            <a:pPr algn="ctr">
+              <a:defRPr sz="1200" b="1">
+                <a:solidFill>
+                  <a:srgbClr val="D99923"/>
+                </a:solidFill>
+                <a:latin typeface="Microsoft YaHei"/>
+                <a:ea typeface="Microsoft YaHei"/>
+                <a:cs typeface="Microsoft YaHei"/>
+              </a:defRPr>
+            </a:pPr>
+            <a:r>
+              <a:rPr sz="1200" b="1">
+                <a:solidFill>
+                  <a:srgbClr val="D99923"/>
+                </a:solidFill>
+                <a:latin typeface="Microsoft YaHei"/>
+                <a:ea typeface="Microsoft YaHei"/>
+                <a:cs typeface="Microsoft YaHei"/>
+              </a:rPr>
+              <a:t>2025</a:t>
+            </a:r>
+          </a:p>
+        </p:txBody>
+      </p:sp>
+      <p:sp>
+        <p:nvSpPr>
+          <p:cNvPr id="15" name="PPAGENT_QA|parent=dual-track-a-0|domains=dual-track-a-cards">
+            <a:extLst xmlns:a="http://schemas.openxmlformats.org/drawingml/2006/main">
+              <a:ext uri="{FF2B5EF4-FFF2-40B4-BE49-F238E27FC236}">
+                <a16:creationId xmlns:a16="http://schemas.microsoft.com/office/drawing/2014/main" id="{DD27CE2D-E11F-4A9A-B35D-7436E0A78070}"/>
+              </a:ext>
+            </a:extLst>
+          </p:cNvPr>
+          <p:cNvSpPr>
+            <a:spLocks xmlns:a="http://schemas.openxmlformats.org/drawingml/2006/main" noGrp="1"/>
+          </p:cNvSpPr>
+          <p:nvPr/>
+        </p:nvSpPr>
+        <p:spPr>
+          <a:xfrm xmlns:a="http://schemas.openxmlformats.org/drawingml/2006/main">
+            <a:off x="3409950" y="1390650"/>
+            <a:ext cx="1714500" cy="1066800"/>
+          </a:xfrm>
+          <a:prstGeom xmlns:a="http://schemas.openxmlformats.org/drawingml/2006/main" prst="roundRect">
+            <a:avLst>
+              <a:gd name="adj" fmla="val 10714"/>
+            </a:avLst>
+          </a:prstGeom>
+          <a:solidFill xmlns:a="http://schemas.openxmlformats.org/drawingml/2006/main">
+            <a:srgbClr val="FFFFFF"/>
+          </a:solidFill>
+          <a:ln xmlns:a="http://schemas.openxmlformats.org/drawingml/2006/main" w="9525">
+            <a:solidFill>
+              <a:srgbClr val="BFD4E7"/>
+            </a:solidFill>
+            <a:prstDash val="solid"/>
+          </a:ln>
+        </p:spPr>
+        <p:style>
+          <a:lnRef xmlns:a="http://schemas.openxmlformats.org/drawingml/2006/main" idx="0"/>
+          <a:fillRef xmlns:a="http://schemas.openxmlformats.org/drawingml/2006/main" idx="0"/>
+          <a:effectRef xmlns:a="http://schemas.openxmlformats.org/drawingml/2006/main" idx="4"/>
+          <a:fontRef xmlns:a="http://schemas.openxmlformats.org/drawingml/2006/main" idx="major"/>
+        </p:style>
+      </p:sp>
+      <p:sp>
+        <p:nvSpPr>
+          <p:cNvPr id="16" name="">
+            <a:extLst xmlns:a="http://schemas.openxmlformats.org/drawingml/2006/main">
+              <a:ext uri="{FF2B5EF4-FFF2-40B4-BE49-F238E27FC236}">
+                <a16:creationId xmlns:a16="http://schemas.microsoft.com/office/drawing/2014/main" id="{1ECDDA65-EB78-4E0C-BCA3-CB42B81F9E08}"/>
+              </a:ext>
+            </a:extLst>
+          </p:cNvPr>
+          <p:cNvSpPr>
+            <a:spLocks xmlns:a="http://schemas.openxmlformats.org/drawingml/2006/main" noGrp="1"/>
+          </p:cNvSpPr>
+          <p:nvPr/>
+        </p:nvSpPr>
+        <p:spPr>
+          <a:xfrm xmlns:a="http://schemas.openxmlformats.org/drawingml/2006/main">
+            <a:off x="3524250" y="1504950"/>
+            <a:ext cx="1485900" cy="323850"/>
           </a:xfrm>
           <a:prstGeom xmlns:a="http://schemas.openxmlformats.org/drawingml/2006/main" prst="rect">
             <a:avLst/>
@@ -1863,10 +1819,10 @@
           </a:bodyPr>
           <a:lstStyle xmlns:a="http://schemas.openxmlformats.org/drawingml/2006/main"/>
           <a:p xmlns:a="http://schemas.openxmlformats.org/drawingml/2006/main">
-            <a:pPr algn="l">
-              <a:defRPr sz="1125" b="1">
-                <a:solidFill>
-                  <a:srgbClr val="E9A62E"/>
+            <a:pPr algn="ctr">
+              <a:defRPr sz="1350" b="1">
+                <a:solidFill>
+                  <a:srgbClr val="1677C8"/>
                 </a:solidFill>
                 <a:latin typeface="Microsoft YaHei"/>
                 <a:ea typeface="Microsoft YaHei"/>
@@ -1874,37 +1830,159 @@
               </a:defRPr>
             </a:pPr>
             <a:r>
-              <a:rPr sz="1125" b="1">
-                <a:solidFill>
-                  <a:srgbClr val="E9A62E"/>
+              <a:rPr sz="1350" b="1">
+                <a:solidFill>
+                  <a:srgbClr val="1677C8"/>
                 </a:solidFill>
                 <a:latin typeface="Microsoft YaHei"/>
                 <a:ea typeface="Microsoft YaHei"/>
                 <a:cs typeface="Microsoft YaHei"/>
               </a:rPr>
-              <a:t>2022</a:t>
+              <a:t>验证场景</a:t>
             </a:r>
           </a:p>
         </p:txBody>
       </p:sp>
       <p:sp>
         <p:nvSpPr>
-          <p:cNvPr id="20" name="">
-            <a:extLst xmlns:a="http://schemas.openxmlformats.org/drawingml/2006/main">
-              <a:ext uri="{FF2B5EF4-FFF2-40B4-BE49-F238E27FC236}">
-                <a16:creationId xmlns:a16="http://schemas.microsoft.com/office/drawing/2014/main" id="{0436649D-C2F0-4972-91CF-6D0E222F04E1}"/>
-              </a:ext>
-            </a:extLst>
-          </p:cNvPr>
-          <p:cNvSpPr>
-            <a:spLocks xmlns:a="http://schemas.openxmlformats.org/drawingml/2006/main" noGrp="1"/>
-          </p:cNvSpPr>
-          <p:nvPr/>
-        </p:nvSpPr>
-        <p:spPr>
-          <a:xfrm xmlns:a="http://schemas.openxmlformats.org/drawingml/2006/main">
-            <a:off x="3511550" y="4648200"/>
-            <a:ext cx="1866900" cy="304800"/>
+          <p:cNvPr id="17" name="">
+            <a:extLst xmlns:a="http://schemas.openxmlformats.org/drawingml/2006/main">
+              <a:ext uri="{FF2B5EF4-FFF2-40B4-BE49-F238E27FC236}">
+                <a16:creationId xmlns:a16="http://schemas.microsoft.com/office/drawing/2014/main" id="{378C9EFF-21D3-45B5-BCE3-0D19C9AC4686}"/>
+              </a:ext>
+            </a:extLst>
+          </p:cNvPr>
+          <p:cNvSpPr>
+            <a:spLocks xmlns:a="http://schemas.openxmlformats.org/drawingml/2006/main" noGrp="1"/>
+          </p:cNvSpPr>
+          <p:nvPr/>
+        </p:nvSpPr>
+        <p:spPr>
+          <a:xfrm xmlns:a="http://schemas.openxmlformats.org/drawingml/2006/main">
+            <a:off x="3524250" y="1885950"/>
+            <a:ext cx="1485900" cy="457200"/>
+          </a:xfrm>
+          <a:prstGeom xmlns:a="http://schemas.openxmlformats.org/drawingml/2006/main" prst="rect">
+            <a:avLst/>
+          </a:prstGeom>
+          <a:noFill xmlns:a="http://schemas.openxmlformats.org/drawingml/2006/main"/>
+          <a:ln xmlns:a="http://schemas.openxmlformats.org/drawingml/2006/main" w="0">
+            <a:noFill/>
+            <a:prstDash val="solid"/>
+          </a:ln>
+        </p:spPr>
+        <p:txBody>
+          <a:bodyPr xmlns:a="http://schemas.openxmlformats.org/drawingml/2006/main" lIns="0" tIns="0" rIns="0" bIns="0" anchor="t">
+            <a:noAutofit/>
+          </a:bodyPr>
+          <a:lstStyle xmlns:a="http://schemas.openxmlformats.org/drawingml/2006/main"/>
+          <a:p xmlns:a="http://schemas.openxmlformats.org/drawingml/2006/main">
+            <a:pPr algn="ctr">
+              <a:defRPr sz="1200" b="0">
+                <a:solidFill>
+                  <a:srgbClr val="475569"/>
+                </a:solidFill>
+                <a:latin typeface="Microsoft YaHei"/>
+                <a:ea typeface="Microsoft YaHei"/>
+                <a:cs typeface="Microsoft YaHei"/>
+              </a:defRPr>
+            </a:pPr>
+            <a:r>
+              <a:rPr sz="1200" b="0">
+                <a:solidFill>
+                  <a:srgbClr val="475569"/>
+                </a:solidFill>
+                <a:latin typeface="Microsoft YaHei"/>
+                <a:ea typeface="Microsoft YaHei"/>
+                <a:cs typeface="Microsoft YaHei"/>
+              </a:rPr>
+              <a:t>完成首个</a:t>
+            </a:r>
+          </a:p>
+          <a:p xmlns:a="http://schemas.openxmlformats.org/drawingml/2006/main">
+            <a:pPr algn="ctr">
+              <a:defRPr sz="1200" b="0">
+                <a:solidFill>
+                  <a:srgbClr val="475569"/>
+                </a:solidFill>
+                <a:latin typeface="Microsoft YaHei"/>
+                <a:ea typeface="Microsoft YaHei"/>
+                <a:cs typeface="Microsoft YaHei"/>
+              </a:defRPr>
+            </a:pPr>
+            <a:r>
+              <a:rPr sz="1200" b="0">
+                <a:solidFill>
+                  <a:srgbClr val="475569"/>
+                </a:solidFill>
+                <a:latin typeface="Microsoft YaHei"/>
+                <a:ea typeface="Microsoft YaHei"/>
+                <a:cs typeface="Microsoft YaHei"/>
+              </a:rPr>
+              <a:t>真实业务闭环</a:t>
+            </a:r>
+          </a:p>
+        </p:txBody>
+      </p:sp>
+      <p:sp>
+        <p:nvSpPr>
+          <p:cNvPr id="18" name="PPAGENT_QA|parent=dual-track-b-0|domains=dual-track-b-cards">
+            <a:extLst xmlns:a="http://schemas.openxmlformats.org/drawingml/2006/main">
+              <a:ext uri="{FF2B5EF4-FFF2-40B4-BE49-F238E27FC236}">
+                <a16:creationId xmlns:a16="http://schemas.microsoft.com/office/drawing/2014/main" id="{EDCE0C46-5388-489A-85AE-F55EAD311F18}"/>
+              </a:ext>
+            </a:extLst>
+          </p:cNvPr>
+          <p:cNvSpPr>
+            <a:spLocks xmlns:a="http://schemas.openxmlformats.org/drawingml/2006/main" noGrp="1"/>
+          </p:cNvSpPr>
+          <p:nvPr/>
+        </p:nvSpPr>
+        <p:spPr>
+          <a:xfrm xmlns:a="http://schemas.openxmlformats.org/drawingml/2006/main">
+            <a:off x="3409950" y="5353050"/>
+            <a:ext cx="1714500" cy="914400"/>
+          </a:xfrm>
+          <a:prstGeom xmlns:a="http://schemas.openxmlformats.org/drawingml/2006/main" prst="roundRect">
+            <a:avLst>
+              <a:gd name="adj" fmla="val 12500"/>
+            </a:avLst>
+          </a:prstGeom>
+          <a:solidFill xmlns:a="http://schemas.openxmlformats.org/drawingml/2006/main">
+            <a:srgbClr val="FFFFFF"/>
+          </a:solidFill>
+          <a:ln xmlns:a="http://schemas.openxmlformats.org/drawingml/2006/main" w="9525">
+            <a:solidFill>
+              <a:srgbClr val="BFD4E7"/>
+            </a:solidFill>
+            <a:prstDash val="solid"/>
+          </a:ln>
+        </p:spPr>
+        <p:style>
+          <a:lnRef xmlns:a="http://schemas.openxmlformats.org/drawingml/2006/main" idx="0"/>
+          <a:fillRef xmlns:a="http://schemas.openxmlformats.org/drawingml/2006/main" idx="0"/>
+          <a:effectRef xmlns:a="http://schemas.openxmlformats.org/drawingml/2006/main" idx="4"/>
+          <a:fontRef xmlns:a="http://schemas.openxmlformats.org/drawingml/2006/main" idx="major"/>
+        </p:style>
+      </p:sp>
+      <p:sp>
+        <p:nvSpPr>
+          <p:cNvPr id="19" name="">
+            <a:extLst xmlns:a="http://schemas.openxmlformats.org/drawingml/2006/main">
+              <a:ext uri="{FF2B5EF4-FFF2-40B4-BE49-F238E27FC236}">
+                <a16:creationId xmlns:a16="http://schemas.microsoft.com/office/drawing/2014/main" id="{260B4B16-DD86-4680-95B2-D9E9DFCBE496}"/>
+              </a:ext>
+            </a:extLst>
+          </p:cNvPr>
+          <p:cNvSpPr>
+            <a:spLocks xmlns:a="http://schemas.openxmlformats.org/drawingml/2006/main" noGrp="1"/>
+          </p:cNvSpPr>
+          <p:nvPr/>
+        </p:nvSpPr>
+        <p:spPr>
+          <a:xfrm xmlns:a="http://schemas.openxmlformats.org/drawingml/2006/main">
+            <a:off x="3524250" y="5448300"/>
+            <a:ext cx="1485900" cy="304800"/>
           </a:xfrm>
           <a:prstGeom xmlns:a="http://schemas.openxmlformats.org/drawingml/2006/main" prst="rect">
             <a:avLst/>
@@ -1921,10 +1999,10 @@
           </a:bodyPr>
           <a:lstStyle xmlns:a="http://schemas.openxmlformats.org/drawingml/2006/main"/>
           <a:p xmlns:a="http://schemas.openxmlformats.org/drawingml/2006/main">
-            <a:pPr algn="l">
-              <a:defRPr sz="1425" b="1">
-                <a:solidFill>
-                  <a:srgbClr val="1677C8"/>
+            <a:pPr algn="ctr">
+              <a:defRPr sz="1350" b="1">
+                <a:solidFill>
+                  <a:srgbClr val="00A8D8"/>
                 </a:solidFill>
                 <a:latin typeface="Microsoft YaHei"/>
                 <a:ea typeface="Microsoft YaHei"/>
@@ -1932,37 +2010,37 @@
               </a:defRPr>
             </a:pPr>
             <a:r>
-              <a:rPr sz="1425" b="1">
-                <a:solidFill>
-                  <a:srgbClr val="1677C8"/>
+              <a:rPr sz="1350" b="1">
+                <a:solidFill>
+                  <a:srgbClr val="00A8D8"/>
                 </a:solidFill>
                 <a:latin typeface="Microsoft YaHei"/>
                 <a:ea typeface="Microsoft YaHei"/>
                 <a:cs typeface="Microsoft YaHei"/>
               </a:rPr>
-              <a:t>流程标准化</a:t>
+              <a:t>搭建基础</a:t>
             </a:r>
           </a:p>
         </p:txBody>
       </p:sp>
       <p:sp>
         <p:nvSpPr>
-          <p:cNvPr id="21" name="">
-            <a:extLst xmlns:a="http://schemas.openxmlformats.org/drawingml/2006/main">
-              <a:ext uri="{FF2B5EF4-FFF2-40B4-BE49-F238E27FC236}">
-                <a16:creationId xmlns:a16="http://schemas.microsoft.com/office/drawing/2014/main" id="{1EBCACA2-BFE6-4A43-A18D-D78036A48D95}"/>
-              </a:ext>
-            </a:extLst>
-          </p:cNvPr>
-          <p:cNvSpPr>
-            <a:spLocks xmlns:a="http://schemas.openxmlformats.org/drawingml/2006/main" noGrp="1"/>
-          </p:cNvSpPr>
-          <p:nvPr/>
-        </p:nvSpPr>
-        <p:spPr>
-          <a:xfrm xmlns:a="http://schemas.openxmlformats.org/drawingml/2006/main">
-            <a:off x="3511550" y="4972050"/>
-            <a:ext cx="1866900" cy="400050"/>
+          <p:cNvPr id="20" name="">
+            <a:extLst xmlns:a="http://schemas.openxmlformats.org/drawingml/2006/main">
+              <a:ext uri="{FF2B5EF4-FFF2-40B4-BE49-F238E27FC236}">
+                <a16:creationId xmlns:a16="http://schemas.microsoft.com/office/drawing/2014/main" id="{8E415410-94FB-48FE-BDC2-89EDC4E4D834}"/>
+              </a:ext>
+            </a:extLst>
+          </p:cNvPr>
+          <p:cNvSpPr>
+            <a:spLocks xmlns:a="http://schemas.openxmlformats.org/drawingml/2006/main" noGrp="1"/>
+          </p:cNvSpPr>
+          <p:nvPr/>
+        </p:nvSpPr>
+        <p:spPr>
+          <a:xfrm xmlns:a="http://schemas.openxmlformats.org/drawingml/2006/main">
+            <a:off x="3524250" y="5791200"/>
+            <a:ext cx="1485900" cy="381000"/>
           </a:xfrm>
           <a:prstGeom xmlns:a="http://schemas.openxmlformats.org/drawingml/2006/main" prst="rect">
             <a:avLst/>
@@ -1975,12 +2053,12 @@
         </p:spPr>
         <p:txBody>
           <a:bodyPr xmlns:a="http://schemas.openxmlformats.org/drawingml/2006/main" lIns="0" tIns="0" rIns="0" bIns="0" anchor="t">
-            <a:normAutofit fontScale="100000"/>
+            <a:noAutofit/>
           </a:bodyPr>
           <a:lstStyle xmlns:a="http://schemas.openxmlformats.org/drawingml/2006/main"/>
           <a:p xmlns:a="http://schemas.openxmlformats.org/drawingml/2006/main">
-            <a:pPr algn="l">
-              <a:defRPr sz="975" b="0">
+            <a:pPr algn="ctr">
+              <a:defRPr sz="1200" b="0">
                 <a:solidFill>
                   <a:srgbClr val="475569"/>
                 </a:solidFill>
@@ -1990,7 +2068,7 @@
               </a:defRPr>
             </a:pPr>
             <a:r>
-              <a:rPr sz="975" b="0">
+              <a:rPr sz="1200" b="0">
                 <a:solidFill>
                   <a:srgbClr val="475569"/>
                 </a:solidFill>
@@ -1998,29 +2076,83 @@
                 <a:ea typeface="Microsoft YaHei"/>
                 <a:cs typeface="Microsoft YaHei"/>
               </a:rPr>
-              <a:t>形成稳定流程和统一数据口径</a:t>
+              <a:t>形成稳定生成</a:t>
+            </a:r>
+          </a:p>
+          <a:p xmlns:a="http://schemas.openxmlformats.org/drawingml/2006/main">
+            <a:pPr algn="ctr">
+              <a:defRPr sz="1200" b="0">
+                <a:solidFill>
+                  <a:srgbClr val="475569"/>
+                </a:solidFill>
+                <a:latin typeface="Microsoft YaHei"/>
+                <a:ea typeface="Microsoft YaHei"/>
+                <a:cs typeface="Microsoft YaHei"/>
+              </a:defRPr>
+            </a:pPr>
+            <a:r>
+              <a:rPr sz="1200" b="0">
+                <a:solidFill>
+                  <a:srgbClr val="475569"/>
+                </a:solidFill>
+                <a:latin typeface="Microsoft YaHei"/>
+                <a:ea typeface="Microsoft YaHei"/>
+                <a:cs typeface="Microsoft YaHei"/>
+              </a:rPr>
+              <a:t>与检查能力</a:t>
             </a:r>
           </a:p>
         </p:txBody>
       </p:sp>
       <p:sp>
         <p:nvSpPr>
+          <p:cNvPr id="21" name="">
+            <a:extLst xmlns:a="http://schemas.openxmlformats.org/drawingml/2006/main">
+              <a:ext uri="{FF2B5EF4-FFF2-40B4-BE49-F238E27FC236}">
+                <a16:creationId xmlns:a16="http://schemas.microsoft.com/office/drawing/2014/main" id="{6A4D190E-3E3A-4DD4-A16F-13B55F02062D}"/>
+              </a:ext>
+            </a:extLst>
+          </p:cNvPr>
+          <p:cNvSpPr>
+            <a:spLocks xmlns:a="http://schemas.openxmlformats.org/drawingml/2006/main" noGrp="1"/>
+          </p:cNvSpPr>
+          <p:nvPr/>
+        </p:nvSpPr>
+        <p:spPr>
+          <a:xfrm xmlns:a="http://schemas.openxmlformats.org/drawingml/2006/main" flipH="0" flipV="0">
+            <a:off x="6369050" y="2552700"/>
+            <a:ext cx="0" cy="2724150"/>
+          </a:xfrm>
+          <a:prstGeom xmlns:a="http://schemas.openxmlformats.org/drawingml/2006/main" prst="line">
+            <a:avLst/>
+          </a:prstGeom>
+          <a:noFill xmlns:a="http://schemas.openxmlformats.org/drawingml/2006/main"/>
+          <a:ln xmlns:a="http://schemas.openxmlformats.org/drawingml/2006/main" w="9525">
+            <a:solidFill>
+              <a:srgbClr val="C2CEDB"/>
+            </a:solidFill>
+            <a:prstDash val="solid"/>
+          </a:ln>
+        </p:spPr>
+      </p:sp>
+      <p:sp>
+        <p:nvSpPr>
           <p:cNvPr id="22" name="">
             <a:extLst xmlns:a="http://schemas.openxmlformats.org/drawingml/2006/main">
               <a:ext uri="{FF2B5EF4-FFF2-40B4-BE49-F238E27FC236}">
-                <a16:creationId xmlns:a16="http://schemas.microsoft.com/office/drawing/2014/main" id="{718A1AFC-1F1E-44C3-970E-C9E05B96761A}"/>
-              </a:ext>
-            </a:extLst>
-          </p:cNvPr>
-          <p:cNvSpPr>
-            <a:spLocks xmlns:a="http://schemas.openxmlformats.org/drawingml/2006/main" noGrp="1"/>
-          </p:cNvSpPr>
-          <p:nvPr/>
-        </p:nvSpPr>
-        <p:spPr>
-          <a:xfrm xmlns:a="http://schemas.openxmlformats.org/drawingml/2006/main">
-            <a:off x="4368800" y="3638550"/>
-            <a:ext cx="152400" cy="152400"/>
+                <a16:creationId xmlns:a16="http://schemas.microsoft.com/office/drawing/2014/main" id="{3448A2EF-4E74-4C32-B762-E2A703BDAD39}"/>
+              </a:ext>
+            </a:extLst>
+          </p:cNvPr>
+          <p:cNvSpPr>
+            <a:spLocks xmlns:a="http://schemas.openxmlformats.org/drawingml/2006/main" noGrp="1"/>
+          </p:cNvSpPr>
+          <p:nvPr/>
+        </p:nvSpPr>
+        <p:spPr>
+          <a:xfrm xmlns:a="http://schemas.openxmlformats.org/drawingml/2006/main">
+            <a:off x="6159500" y="2800350"/>
+            <a:ext cx="419100" cy="419100"/>
           </a:xfrm>
           <a:prstGeom xmlns:a="http://schemas.openxmlformats.org/drawingml/2006/main" prst="ellipse">
             <a:avLst/>
@@ -2029,72 +2161,6 @@
             <a:srgbClr val="FFFFFF"/>
           </a:solidFill>
           <a:ln xmlns:a="http://schemas.openxmlformats.org/drawingml/2006/main" w="28575">
-            <a:solidFill>
-              <a:srgbClr val="1677C8"/>
-            </a:solidFill>
-            <a:prstDash val="solid"/>
-          </a:ln>
-        </p:spPr>
-      </p:sp>
-      <p:sp>
-        <p:nvSpPr>
-          <p:cNvPr id="23" name="">
-            <a:extLst xmlns:a="http://schemas.openxmlformats.org/drawingml/2006/main">
-              <a:ext uri="{FF2B5EF4-FFF2-40B4-BE49-F238E27FC236}">
-                <a16:creationId xmlns:a16="http://schemas.microsoft.com/office/drawing/2014/main" id="{F9BCF50B-B817-47C8-91DB-6E29FD6B1367}"/>
-              </a:ext>
-            </a:extLst>
-          </p:cNvPr>
-          <p:cNvSpPr>
-            <a:spLocks xmlns:a="http://schemas.openxmlformats.org/drawingml/2006/main" noGrp="1"/>
-          </p:cNvSpPr>
-          <p:nvPr/>
-        </p:nvSpPr>
-        <p:spPr>
-          <a:xfrm xmlns:a="http://schemas.openxmlformats.org/drawingml/2006/main" flipV="1">
-            <a:off x="7747000" y="2495550"/>
-            <a:ext cx="0" cy="1219200"/>
-          </a:xfrm>
-          <a:prstGeom xmlns:a="http://schemas.openxmlformats.org/drawingml/2006/main" prst="line">
-            <a:avLst/>
-          </a:prstGeom>
-          <a:noFill xmlns:a="http://schemas.openxmlformats.org/drawingml/2006/main"/>
-          <a:ln xmlns:a="http://schemas.openxmlformats.org/drawingml/2006/main" w="14288">
-            <a:solidFill>
-              <a:srgbClr val="C9D5E3"/>
-            </a:solidFill>
-            <a:prstDash val="solid"/>
-          </a:ln>
-        </p:spPr>
-      </p:sp>
-      <p:sp>
-        <p:nvSpPr>
-          <p:cNvPr id="24" name="">
-            <a:extLst xmlns:a="http://schemas.openxmlformats.org/drawingml/2006/main">
-              <a:ext uri="{FF2B5EF4-FFF2-40B4-BE49-F238E27FC236}">
-                <a16:creationId xmlns:a16="http://schemas.microsoft.com/office/drawing/2014/main" id="{C5FEEBFC-7D9A-4186-B902-875BF48F01DF}"/>
-              </a:ext>
-            </a:extLst>
-          </p:cNvPr>
-          <p:cNvSpPr>
-            <a:spLocks xmlns:a="http://schemas.openxmlformats.org/drawingml/2006/main" noGrp="1"/>
-          </p:cNvSpPr>
-          <p:nvPr/>
-        </p:nvSpPr>
-        <p:spPr>
-          <a:xfrm xmlns:a="http://schemas.openxmlformats.org/drawingml/2006/main">
-            <a:off x="6680200" y="1295400"/>
-            <a:ext cx="2133600" cy="1200150"/>
-          </a:xfrm>
-          <a:prstGeom xmlns:a="http://schemas.openxmlformats.org/drawingml/2006/main" prst="roundRect">
-            <a:avLst>
-              <a:gd name="adj" fmla="val 9524"/>
-            </a:avLst>
-          </a:prstGeom>
-          <a:solidFill xmlns:a="http://schemas.openxmlformats.org/drawingml/2006/main">
-            <a:srgbClr val="FFFFFF"/>
-          </a:solidFill>
-          <a:ln xmlns:a="http://schemas.openxmlformats.org/drawingml/2006/main" w="14288">
             <a:solidFill>
               <a:srgbClr val="1677C8"/>
             </a:solidFill>
@@ -2107,45 +2173,16 @@
           <a:effectRef xmlns:a="http://schemas.openxmlformats.org/drawingml/2006/main" idx="4"/>
           <a:fontRef xmlns:a="http://schemas.openxmlformats.org/drawingml/2006/main" idx="major"/>
         </p:style>
-      </p:sp>
-      <p:sp>
-        <p:nvSpPr>
-          <p:cNvPr id="25" name="">
-            <a:extLst xmlns:a="http://schemas.openxmlformats.org/drawingml/2006/main">
-              <a:ext uri="{FF2B5EF4-FFF2-40B4-BE49-F238E27FC236}">
-                <a16:creationId xmlns:a16="http://schemas.microsoft.com/office/drawing/2014/main" id="{64D5AEF0-F578-458A-9112-931FBB1818C9}"/>
-              </a:ext>
-            </a:extLst>
-          </p:cNvPr>
-          <p:cNvSpPr>
-            <a:spLocks xmlns:a="http://schemas.openxmlformats.org/drawingml/2006/main" noGrp="1"/>
-          </p:cNvSpPr>
-          <p:nvPr/>
-        </p:nvSpPr>
-        <p:spPr>
-          <a:xfrm xmlns:a="http://schemas.openxmlformats.org/drawingml/2006/main">
-            <a:off x="6813550" y="1409700"/>
-            <a:ext cx="1866900" cy="228600"/>
-          </a:xfrm>
-          <a:prstGeom xmlns:a="http://schemas.openxmlformats.org/drawingml/2006/main" prst="rect">
-            <a:avLst/>
-          </a:prstGeom>
-          <a:noFill xmlns:a="http://schemas.openxmlformats.org/drawingml/2006/main"/>
-          <a:ln xmlns:a="http://schemas.openxmlformats.org/drawingml/2006/main" w="0">
-            <a:noFill/>
-            <a:prstDash val="solid"/>
-          </a:ln>
-        </p:spPr>
         <p:txBody>
           <a:bodyPr xmlns:a="http://schemas.openxmlformats.org/drawingml/2006/main" lIns="0" tIns="0" rIns="0" bIns="0" anchor="ctr">
             <a:normAutofit fontScale="100000"/>
           </a:bodyPr>
           <a:lstStyle xmlns:a="http://schemas.openxmlformats.org/drawingml/2006/main"/>
           <a:p xmlns:a="http://schemas.openxmlformats.org/drawingml/2006/main">
-            <a:pPr algn="l">
-              <a:defRPr sz="1125" b="1">
-                <a:solidFill>
-                  <a:srgbClr val="E9A62E"/>
+            <a:pPr algn="ctr">
+              <a:defRPr sz="1200" b="1">
+                <a:solidFill>
+                  <a:srgbClr val="1677C8"/>
                 </a:solidFill>
                 <a:latin typeface="Microsoft YaHei"/>
                 <a:ea typeface="Microsoft YaHei"/>
@@ -2153,57 +2190,67 @@
               </a:defRPr>
             </a:pPr>
             <a:r>
-              <a:rPr sz="1125" b="1">
-                <a:solidFill>
-                  <a:srgbClr val="E9A62E"/>
+              <a:rPr sz="1200" b="1">
+                <a:solidFill>
+                  <a:srgbClr val="1677C8"/>
                 </a:solidFill>
                 <a:latin typeface="Microsoft YaHei"/>
                 <a:ea typeface="Microsoft YaHei"/>
                 <a:cs typeface="Microsoft YaHei"/>
               </a:rPr>
-              <a:t>2023</a:t>
+              <a:t>02</a:t>
             </a:r>
           </a:p>
         </p:txBody>
       </p:sp>
       <p:sp>
         <p:nvSpPr>
-          <p:cNvPr id="26" name="">
-            <a:extLst xmlns:a="http://schemas.openxmlformats.org/drawingml/2006/main">
-              <a:ext uri="{FF2B5EF4-FFF2-40B4-BE49-F238E27FC236}">
-                <a16:creationId xmlns:a16="http://schemas.microsoft.com/office/drawing/2014/main" id="{6C2198D8-1EC0-4CDB-9F1C-38F43134103A}"/>
-              </a:ext>
-            </a:extLst>
-          </p:cNvPr>
-          <p:cNvSpPr>
-            <a:spLocks xmlns:a="http://schemas.openxmlformats.org/drawingml/2006/main" noGrp="1"/>
-          </p:cNvSpPr>
-          <p:nvPr/>
-        </p:nvSpPr>
-        <p:spPr>
-          <a:xfrm xmlns:a="http://schemas.openxmlformats.org/drawingml/2006/main">
-            <a:off x="6813550" y="1657350"/>
-            <a:ext cx="1866900" cy="304800"/>
-          </a:xfrm>
-          <a:prstGeom xmlns:a="http://schemas.openxmlformats.org/drawingml/2006/main" prst="rect">
-            <a:avLst/>
-          </a:prstGeom>
-          <a:noFill xmlns:a="http://schemas.openxmlformats.org/drawingml/2006/main"/>
-          <a:ln xmlns:a="http://schemas.openxmlformats.org/drawingml/2006/main" w="0">
-            <a:noFill/>
-            <a:prstDash val="solid"/>
-          </a:ln>
-        </p:spPr>
+          <p:cNvPr id="23" name="">
+            <a:extLst xmlns:a="http://schemas.openxmlformats.org/drawingml/2006/main">
+              <a:ext uri="{FF2B5EF4-FFF2-40B4-BE49-F238E27FC236}">
+                <a16:creationId xmlns:a16="http://schemas.microsoft.com/office/drawing/2014/main" id="{63817F2B-BBEF-49CE-8CF2-1DE9244F9210}"/>
+              </a:ext>
+            </a:extLst>
+          </p:cNvPr>
+          <p:cNvSpPr>
+            <a:spLocks xmlns:a="http://schemas.openxmlformats.org/drawingml/2006/main" noGrp="1"/>
+          </p:cNvSpPr>
+          <p:nvPr/>
+        </p:nvSpPr>
+        <p:spPr>
+          <a:xfrm xmlns:a="http://schemas.openxmlformats.org/drawingml/2006/main">
+            <a:off x="6159500" y="4610100"/>
+            <a:ext cx="419100" cy="419100"/>
+          </a:xfrm>
+          <a:prstGeom xmlns:a="http://schemas.openxmlformats.org/drawingml/2006/main" prst="ellipse">
+            <a:avLst/>
+          </a:prstGeom>
+          <a:solidFill xmlns:a="http://schemas.openxmlformats.org/drawingml/2006/main">
+            <a:srgbClr val="FFFFFF"/>
+          </a:solidFill>
+          <a:ln xmlns:a="http://schemas.openxmlformats.org/drawingml/2006/main" w="28575">
+            <a:solidFill>
+              <a:srgbClr val="00A8D8"/>
+            </a:solidFill>
+            <a:prstDash val="solid"/>
+          </a:ln>
+        </p:spPr>
+        <p:style>
+          <a:lnRef xmlns:a="http://schemas.openxmlformats.org/drawingml/2006/main" idx="0"/>
+          <a:fillRef xmlns:a="http://schemas.openxmlformats.org/drawingml/2006/main" idx="0"/>
+          <a:effectRef xmlns:a="http://schemas.openxmlformats.org/drawingml/2006/main" idx="4"/>
+          <a:fontRef xmlns:a="http://schemas.openxmlformats.org/drawingml/2006/main" idx="major"/>
+        </p:style>
         <p:txBody>
           <a:bodyPr xmlns:a="http://schemas.openxmlformats.org/drawingml/2006/main" lIns="0" tIns="0" rIns="0" bIns="0" anchor="ctr">
             <a:normAutofit fontScale="100000"/>
           </a:bodyPr>
           <a:lstStyle xmlns:a="http://schemas.openxmlformats.org/drawingml/2006/main"/>
           <a:p xmlns:a="http://schemas.openxmlformats.org/drawingml/2006/main">
-            <a:pPr algn="l">
-              <a:defRPr sz="1425" b="1">
-                <a:solidFill>
-                  <a:srgbClr val="1677C8"/>
+            <a:pPr algn="ctr">
+              <a:defRPr sz="1200" b="1">
+                <a:solidFill>
+                  <a:srgbClr val="00A8D8"/>
                 </a:solidFill>
                 <a:latin typeface="Microsoft YaHei"/>
                 <a:ea typeface="Microsoft YaHei"/>
@@ -2211,171 +2258,49 @@
               </a:defRPr>
             </a:pPr>
             <a:r>
-              <a:rPr sz="1425" b="1">
-                <a:solidFill>
-                  <a:srgbClr val="1677C8"/>
+              <a:rPr sz="1200" b="1">
+                <a:solidFill>
+                  <a:srgbClr val="00A8D8"/>
                 </a:solidFill>
                 <a:latin typeface="Microsoft YaHei"/>
                 <a:ea typeface="Microsoft YaHei"/>
                 <a:cs typeface="Microsoft YaHei"/>
               </a:rPr>
-              <a:t>平台化扩展</a:t>
+              <a:t>02</a:t>
             </a:r>
           </a:p>
         </p:txBody>
       </p:sp>
       <p:sp>
         <p:nvSpPr>
-          <p:cNvPr id="27" name="">
-            <a:extLst xmlns:a="http://schemas.openxmlformats.org/drawingml/2006/main">
-              <a:ext uri="{FF2B5EF4-FFF2-40B4-BE49-F238E27FC236}">
-                <a16:creationId xmlns:a16="http://schemas.microsoft.com/office/drawing/2014/main" id="{31C78D3F-DBA2-426B-B7BA-EC8BA0E9F3AF}"/>
-              </a:ext>
-            </a:extLst>
-          </p:cNvPr>
-          <p:cNvSpPr>
-            <a:spLocks xmlns:a="http://schemas.openxmlformats.org/drawingml/2006/main" noGrp="1"/>
-          </p:cNvSpPr>
-          <p:nvPr/>
-        </p:nvSpPr>
-        <p:spPr>
-          <a:xfrm xmlns:a="http://schemas.openxmlformats.org/drawingml/2006/main">
-            <a:off x="6813550" y="1981200"/>
-            <a:ext cx="1866900" cy="400050"/>
-          </a:xfrm>
-          <a:prstGeom xmlns:a="http://schemas.openxmlformats.org/drawingml/2006/main" prst="rect">
-            <a:avLst/>
-          </a:prstGeom>
-          <a:noFill xmlns:a="http://schemas.openxmlformats.org/drawingml/2006/main"/>
-          <a:ln xmlns:a="http://schemas.openxmlformats.org/drawingml/2006/main" w="0">
-            <a:noFill/>
-            <a:prstDash val="solid"/>
-          </a:ln>
-        </p:spPr>
-        <p:txBody>
-          <a:bodyPr xmlns:a="http://schemas.openxmlformats.org/drawingml/2006/main" lIns="0" tIns="0" rIns="0" bIns="0" anchor="t">
-            <a:normAutofit fontScale="100000"/>
-          </a:bodyPr>
-          <a:lstStyle xmlns:a="http://schemas.openxmlformats.org/drawingml/2006/main"/>
-          <a:p xmlns:a="http://schemas.openxmlformats.org/drawingml/2006/main">
-            <a:pPr algn="l">
-              <a:defRPr sz="975" b="0">
-                <a:solidFill>
-                  <a:srgbClr val="475569"/>
-                </a:solidFill>
-                <a:latin typeface="Microsoft YaHei"/>
-                <a:ea typeface="Microsoft YaHei"/>
-                <a:cs typeface="Microsoft YaHei"/>
-              </a:defRPr>
-            </a:pPr>
-            <a:r>
-              <a:rPr sz="975" b="0">
-                <a:solidFill>
-                  <a:srgbClr val="475569"/>
-                </a:solidFill>
-                <a:latin typeface="Microsoft YaHei"/>
-                <a:ea typeface="Microsoft YaHei"/>
-                <a:cs typeface="Microsoft YaHei"/>
-              </a:rPr>
-              <a:t>沉淀公共能力并支持多场景复用</a:t>
-            </a:r>
-          </a:p>
-        </p:txBody>
-      </p:sp>
-      <p:sp>
-        <p:nvSpPr>
-          <p:cNvPr id="28" name="">
-            <a:extLst xmlns:a="http://schemas.openxmlformats.org/drawingml/2006/main">
-              <a:ext uri="{FF2B5EF4-FFF2-40B4-BE49-F238E27FC236}">
-                <a16:creationId xmlns:a16="http://schemas.microsoft.com/office/drawing/2014/main" id="{F2D4464C-218E-47CD-980C-359BAFDFF093}"/>
-              </a:ext>
-            </a:extLst>
-          </p:cNvPr>
-          <p:cNvSpPr>
-            <a:spLocks xmlns:a="http://schemas.openxmlformats.org/drawingml/2006/main" noGrp="1"/>
-          </p:cNvSpPr>
-          <p:nvPr/>
-        </p:nvSpPr>
-        <p:spPr>
-          <a:xfrm xmlns:a="http://schemas.openxmlformats.org/drawingml/2006/main">
-            <a:off x="7670800" y="3638550"/>
-            <a:ext cx="152400" cy="152400"/>
-          </a:xfrm>
-          <a:prstGeom xmlns:a="http://schemas.openxmlformats.org/drawingml/2006/main" prst="ellipse">
-            <a:avLst/>
+          <p:cNvPr id="24" name="">
+            <a:extLst xmlns:a="http://schemas.openxmlformats.org/drawingml/2006/main">
+              <a:ext uri="{FF2B5EF4-FFF2-40B4-BE49-F238E27FC236}">
+                <a16:creationId xmlns:a16="http://schemas.microsoft.com/office/drawing/2014/main" id="{65799A89-5138-4D91-8116-20559647E72F}"/>
+              </a:ext>
+            </a:extLst>
+          </p:cNvPr>
+          <p:cNvSpPr>
+            <a:spLocks xmlns:a="http://schemas.openxmlformats.org/drawingml/2006/main" noGrp="1"/>
+          </p:cNvSpPr>
+          <p:nvPr/>
+        </p:nvSpPr>
+        <p:spPr>
+          <a:xfrm xmlns:a="http://schemas.openxmlformats.org/drawingml/2006/main">
+            <a:off x="5930900" y="3562350"/>
+            <a:ext cx="876300" cy="342900"/>
+          </a:xfrm>
+          <a:prstGeom xmlns:a="http://schemas.openxmlformats.org/drawingml/2006/main" prst="roundRect">
+            <a:avLst>
+              <a:gd name="adj" fmla="val 33333"/>
+            </a:avLst>
           </a:prstGeom>
           <a:solidFill xmlns:a="http://schemas.openxmlformats.org/drawingml/2006/main">
             <a:srgbClr val="FFFFFF"/>
           </a:solidFill>
-          <a:ln xmlns:a="http://schemas.openxmlformats.org/drawingml/2006/main" w="28575">
+          <a:ln xmlns:a="http://schemas.openxmlformats.org/drawingml/2006/main" w="9525">
             <a:solidFill>
-              <a:srgbClr val="00A8D8"/>
-            </a:solidFill>
-            <a:prstDash val="solid"/>
-          </a:ln>
-        </p:spPr>
-      </p:sp>
-      <p:sp>
-        <p:nvSpPr>
-          <p:cNvPr id="29" name="">
-            <a:extLst xmlns:a="http://schemas.openxmlformats.org/drawingml/2006/main">
-              <a:ext uri="{FF2B5EF4-FFF2-40B4-BE49-F238E27FC236}">
-                <a16:creationId xmlns:a16="http://schemas.microsoft.com/office/drawing/2014/main" id="{0C9B489F-A79D-4F37-B546-246E1D506321}"/>
-              </a:ext>
-            </a:extLst>
-          </p:cNvPr>
-          <p:cNvSpPr>
-            <a:spLocks xmlns:a="http://schemas.openxmlformats.org/drawingml/2006/main" noGrp="1"/>
-          </p:cNvSpPr>
-          <p:nvPr/>
-        </p:nvSpPr>
-        <p:spPr>
-          <a:xfrm xmlns:a="http://schemas.openxmlformats.org/drawingml/2006/main" flipV="0">
-            <a:off x="11049000" y="3714750"/>
-            <a:ext cx="0" cy="571500"/>
-          </a:xfrm>
-          <a:prstGeom xmlns:a="http://schemas.openxmlformats.org/drawingml/2006/main" prst="line">
-            <a:avLst/>
-          </a:prstGeom>
-          <a:noFill xmlns:a="http://schemas.openxmlformats.org/drawingml/2006/main"/>
-          <a:ln xmlns:a="http://schemas.openxmlformats.org/drawingml/2006/main" w="14288">
-            <a:solidFill>
-              <a:srgbClr val="C9D5E3"/>
-            </a:solidFill>
-            <a:prstDash val="solid"/>
-          </a:ln>
-        </p:spPr>
-      </p:sp>
-      <p:sp>
-        <p:nvSpPr>
-          <p:cNvPr id="30" name="">
-            <a:extLst xmlns:a="http://schemas.openxmlformats.org/drawingml/2006/main">
-              <a:ext uri="{FF2B5EF4-FFF2-40B4-BE49-F238E27FC236}">
-                <a16:creationId xmlns:a16="http://schemas.microsoft.com/office/drawing/2014/main" id="{AD4B44BE-91BF-44B5-83B9-FAAAEC4C7B53}"/>
-              </a:ext>
-            </a:extLst>
-          </p:cNvPr>
-          <p:cNvSpPr>
-            <a:spLocks xmlns:a="http://schemas.openxmlformats.org/drawingml/2006/main" noGrp="1"/>
-          </p:cNvSpPr>
-          <p:nvPr/>
-        </p:nvSpPr>
-        <p:spPr>
-          <a:xfrm xmlns:a="http://schemas.openxmlformats.org/drawingml/2006/main">
-            <a:off x="9601200" y="4286250"/>
-            <a:ext cx="2133600" cy="1200150"/>
-          </a:xfrm>
-          <a:prstGeom xmlns:a="http://schemas.openxmlformats.org/drawingml/2006/main" prst="roundRect">
-            <a:avLst>
-              <a:gd name="adj" fmla="val 9524"/>
-            </a:avLst>
-          </a:prstGeom>
-          <a:solidFill xmlns:a="http://schemas.openxmlformats.org/drawingml/2006/main">
-            <a:srgbClr val="FFFFFF"/>
-          </a:solidFill>
-          <a:ln xmlns:a="http://schemas.openxmlformats.org/drawingml/2006/main" w="14288">
-            <a:solidFill>
-              <a:srgbClr val="00A8D8"/>
+              <a:srgbClr val="D6E1EC"/>
             </a:solidFill>
             <a:prstDash val="solid"/>
           </a:ln>
@@ -2386,25 +2311,95 @@
           <a:effectRef xmlns:a="http://schemas.openxmlformats.org/drawingml/2006/main" idx="4"/>
           <a:fontRef xmlns:a="http://schemas.openxmlformats.org/drawingml/2006/main" idx="major"/>
         </p:style>
-      </p:sp>
-      <p:sp>
-        <p:nvSpPr>
-          <p:cNvPr id="31" name="">
-            <a:extLst xmlns:a="http://schemas.openxmlformats.org/drawingml/2006/main">
-              <a:ext uri="{FF2B5EF4-FFF2-40B4-BE49-F238E27FC236}">
-                <a16:creationId xmlns:a16="http://schemas.microsoft.com/office/drawing/2014/main" id="{A234A8AB-5AE4-4787-96F0-2C36621C7209}"/>
-              </a:ext>
-            </a:extLst>
-          </p:cNvPr>
-          <p:cNvSpPr>
-            <a:spLocks xmlns:a="http://schemas.openxmlformats.org/drawingml/2006/main" noGrp="1"/>
-          </p:cNvSpPr>
-          <p:nvPr/>
-        </p:nvSpPr>
-        <p:spPr>
-          <a:xfrm xmlns:a="http://schemas.openxmlformats.org/drawingml/2006/main">
-            <a:off x="9734550" y="4400550"/>
-            <a:ext cx="1866900" cy="228600"/>
+        <p:txBody>
+          <a:bodyPr xmlns:a="http://schemas.openxmlformats.org/drawingml/2006/main" lIns="38100" tIns="9525" rIns="38100" bIns="9525" anchor="ctr">
+            <a:normAutofit fontScale="100000"/>
+          </a:bodyPr>
+          <a:lstStyle xmlns:a="http://schemas.openxmlformats.org/drawingml/2006/main"/>
+          <a:p xmlns:a="http://schemas.openxmlformats.org/drawingml/2006/main">
+            <a:pPr algn="ctr">
+              <a:defRPr sz="1200" b="1">
+                <a:solidFill>
+                  <a:srgbClr val="D99923"/>
+                </a:solidFill>
+                <a:latin typeface="Microsoft YaHei"/>
+                <a:ea typeface="Microsoft YaHei"/>
+                <a:cs typeface="Microsoft YaHei"/>
+              </a:defRPr>
+            </a:pPr>
+            <a:r>
+              <a:rPr sz="1200" b="1">
+                <a:solidFill>
+                  <a:srgbClr val="D99923"/>
+                </a:solidFill>
+                <a:latin typeface="Microsoft YaHei"/>
+                <a:ea typeface="Microsoft YaHei"/>
+                <a:cs typeface="Microsoft YaHei"/>
+              </a:rPr>
+              <a:t>2026</a:t>
+            </a:r>
+          </a:p>
+        </p:txBody>
+      </p:sp>
+      <p:sp>
+        <p:nvSpPr>
+          <p:cNvPr id="25" name="PPAGENT_QA|parent=dual-track-a-1|domains=dual-track-a-cards">
+            <a:extLst xmlns:a="http://schemas.openxmlformats.org/drawingml/2006/main">
+              <a:ext uri="{FF2B5EF4-FFF2-40B4-BE49-F238E27FC236}">
+                <a16:creationId xmlns:a16="http://schemas.microsoft.com/office/drawing/2014/main" id="{2D7D3358-17F0-477A-9F4D-4D3341124675}"/>
+              </a:ext>
+            </a:extLst>
+          </p:cNvPr>
+          <p:cNvSpPr>
+            <a:spLocks xmlns:a="http://schemas.openxmlformats.org/drawingml/2006/main" noGrp="1"/>
+          </p:cNvSpPr>
+          <p:nvPr/>
+        </p:nvSpPr>
+        <p:spPr>
+          <a:xfrm xmlns:a="http://schemas.openxmlformats.org/drawingml/2006/main">
+            <a:off x="5511800" y="1390650"/>
+            <a:ext cx="1714500" cy="1066800"/>
+          </a:xfrm>
+          <a:prstGeom xmlns:a="http://schemas.openxmlformats.org/drawingml/2006/main" prst="roundRect">
+            <a:avLst>
+              <a:gd name="adj" fmla="val 10714"/>
+            </a:avLst>
+          </a:prstGeom>
+          <a:solidFill xmlns:a="http://schemas.openxmlformats.org/drawingml/2006/main">
+            <a:srgbClr val="FFFFFF"/>
+          </a:solidFill>
+          <a:ln xmlns:a="http://schemas.openxmlformats.org/drawingml/2006/main" w="9525">
+            <a:solidFill>
+              <a:srgbClr val="BFD4E7"/>
+            </a:solidFill>
+            <a:prstDash val="solid"/>
+          </a:ln>
+        </p:spPr>
+        <p:style>
+          <a:lnRef xmlns:a="http://schemas.openxmlformats.org/drawingml/2006/main" idx="0"/>
+          <a:fillRef xmlns:a="http://schemas.openxmlformats.org/drawingml/2006/main" idx="0"/>
+          <a:effectRef xmlns:a="http://schemas.openxmlformats.org/drawingml/2006/main" idx="4"/>
+          <a:fontRef xmlns:a="http://schemas.openxmlformats.org/drawingml/2006/main" idx="major"/>
+        </p:style>
+      </p:sp>
+      <p:sp>
+        <p:nvSpPr>
+          <p:cNvPr id="26" name="">
+            <a:extLst xmlns:a="http://schemas.openxmlformats.org/drawingml/2006/main">
+              <a:ext uri="{FF2B5EF4-FFF2-40B4-BE49-F238E27FC236}">
+                <a16:creationId xmlns:a16="http://schemas.microsoft.com/office/drawing/2014/main" id="{C5ACF886-1815-4C49-BC15-3546ED38D4EE}"/>
+              </a:ext>
+            </a:extLst>
+          </p:cNvPr>
+          <p:cNvSpPr>
+            <a:spLocks xmlns:a="http://schemas.openxmlformats.org/drawingml/2006/main" noGrp="1"/>
+          </p:cNvSpPr>
+          <p:nvPr/>
+        </p:nvSpPr>
+        <p:spPr>
+          <a:xfrm xmlns:a="http://schemas.openxmlformats.org/drawingml/2006/main">
+            <a:off x="5626100" y="1504950"/>
+            <a:ext cx="1485900" cy="323850"/>
           </a:xfrm>
           <a:prstGeom xmlns:a="http://schemas.openxmlformats.org/drawingml/2006/main" prst="rect">
             <a:avLst/>
@@ -2421,10 +2416,10 @@
           </a:bodyPr>
           <a:lstStyle xmlns:a="http://schemas.openxmlformats.org/drawingml/2006/main"/>
           <a:p xmlns:a="http://schemas.openxmlformats.org/drawingml/2006/main">
-            <a:pPr algn="l">
-              <a:defRPr sz="1125" b="1">
-                <a:solidFill>
-                  <a:srgbClr val="E9A62E"/>
+            <a:pPr algn="ctr">
+              <a:defRPr sz="1350" b="1">
+                <a:solidFill>
+                  <a:srgbClr val="1677C8"/>
                 </a:solidFill>
                 <a:latin typeface="Microsoft YaHei"/>
                 <a:ea typeface="Microsoft YaHei"/>
@@ -2432,37 +2427,159 @@
               </a:defRPr>
             </a:pPr>
             <a:r>
-              <a:rPr sz="1125" b="1">
-                <a:solidFill>
-                  <a:srgbClr val="E9A62E"/>
+              <a:rPr sz="1350" b="1">
+                <a:solidFill>
+                  <a:srgbClr val="1677C8"/>
                 </a:solidFill>
                 <a:latin typeface="Microsoft YaHei"/>
                 <a:ea typeface="Microsoft YaHei"/>
                 <a:cs typeface="Microsoft YaHei"/>
               </a:rPr>
-              <a:t>2024</a:t>
+              <a:t>标准流程</a:t>
             </a:r>
           </a:p>
         </p:txBody>
       </p:sp>
       <p:sp>
         <p:nvSpPr>
-          <p:cNvPr id="32" name="">
-            <a:extLst xmlns:a="http://schemas.openxmlformats.org/drawingml/2006/main">
-              <a:ext uri="{FF2B5EF4-FFF2-40B4-BE49-F238E27FC236}">
-                <a16:creationId xmlns:a16="http://schemas.microsoft.com/office/drawing/2014/main" id="{E63174BE-BA0B-4163-A518-D8A5CD8D3EE2}"/>
-              </a:ext>
-            </a:extLst>
-          </p:cNvPr>
-          <p:cNvSpPr>
-            <a:spLocks xmlns:a="http://schemas.openxmlformats.org/drawingml/2006/main" noGrp="1"/>
-          </p:cNvSpPr>
-          <p:nvPr/>
-        </p:nvSpPr>
-        <p:spPr>
-          <a:xfrm xmlns:a="http://schemas.openxmlformats.org/drawingml/2006/main">
-            <a:off x="9734550" y="4648200"/>
-            <a:ext cx="1866900" cy="304800"/>
+          <p:cNvPr id="27" name="">
+            <a:extLst xmlns:a="http://schemas.openxmlformats.org/drawingml/2006/main">
+              <a:ext uri="{FF2B5EF4-FFF2-40B4-BE49-F238E27FC236}">
+                <a16:creationId xmlns:a16="http://schemas.microsoft.com/office/drawing/2014/main" id="{30829142-7957-4E49-9FFC-8200D401E766}"/>
+              </a:ext>
+            </a:extLst>
+          </p:cNvPr>
+          <p:cNvSpPr>
+            <a:spLocks xmlns:a="http://schemas.openxmlformats.org/drawingml/2006/main" noGrp="1"/>
+          </p:cNvSpPr>
+          <p:nvPr/>
+        </p:nvSpPr>
+        <p:spPr>
+          <a:xfrm xmlns:a="http://schemas.openxmlformats.org/drawingml/2006/main">
+            <a:off x="5626100" y="1885950"/>
+            <a:ext cx="1485900" cy="457200"/>
+          </a:xfrm>
+          <a:prstGeom xmlns:a="http://schemas.openxmlformats.org/drawingml/2006/main" prst="rect">
+            <a:avLst/>
+          </a:prstGeom>
+          <a:noFill xmlns:a="http://schemas.openxmlformats.org/drawingml/2006/main"/>
+          <a:ln xmlns:a="http://schemas.openxmlformats.org/drawingml/2006/main" w="0">
+            <a:noFill/>
+            <a:prstDash val="solid"/>
+          </a:ln>
+        </p:spPr>
+        <p:txBody>
+          <a:bodyPr xmlns:a="http://schemas.openxmlformats.org/drawingml/2006/main" lIns="0" tIns="0" rIns="0" bIns="0" anchor="t">
+            <a:noAutofit/>
+          </a:bodyPr>
+          <a:lstStyle xmlns:a="http://schemas.openxmlformats.org/drawingml/2006/main"/>
+          <a:p xmlns:a="http://schemas.openxmlformats.org/drawingml/2006/main">
+            <a:pPr algn="ctr">
+              <a:defRPr sz="1200" b="0">
+                <a:solidFill>
+                  <a:srgbClr val="475569"/>
+                </a:solidFill>
+                <a:latin typeface="Microsoft YaHei"/>
+                <a:ea typeface="Microsoft YaHei"/>
+                <a:cs typeface="Microsoft YaHei"/>
+              </a:defRPr>
+            </a:pPr>
+            <a:r>
+              <a:rPr sz="1200" b="0">
+                <a:solidFill>
+                  <a:srgbClr val="475569"/>
+                </a:solidFill>
+                <a:latin typeface="Microsoft YaHei"/>
+                <a:ea typeface="Microsoft YaHei"/>
+                <a:cs typeface="Microsoft YaHei"/>
+              </a:rPr>
+              <a:t>明确交付标准</a:t>
+            </a:r>
+          </a:p>
+          <a:p xmlns:a="http://schemas.openxmlformats.org/drawingml/2006/main">
+            <a:pPr algn="ctr">
+              <a:defRPr sz="1200" b="0">
+                <a:solidFill>
+                  <a:srgbClr val="475569"/>
+                </a:solidFill>
+                <a:latin typeface="Microsoft YaHei"/>
+                <a:ea typeface="Microsoft YaHei"/>
+                <a:cs typeface="Microsoft YaHei"/>
+              </a:defRPr>
+            </a:pPr>
+            <a:r>
+              <a:rPr sz="1200" b="0">
+                <a:solidFill>
+                  <a:srgbClr val="475569"/>
+                </a:solidFill>
+                <a:latin typeface="Microsoft YaHei"/>
+                <a:ea typeface="Microsoft YaHei"/>
+                <a:cs typeface="Microsoft YaHei"/>
+              </a:rPr>
+              <a:t>和协作边界</a:t>
+            </a:r>
+          </a:p>
+        </p:txBody>
+      </p:sp>
+      <p:sp>
+        <p:nvSpPr>
+          <p:cNvPr id="28" name="PPAGENT_QA|parent=dual-track-b-1|domains=dual-track-b-cards">
+            <a:extLst xmlns:a="http://schemas.openxmlformats.org/drawingml/2006/main">
+              <a:ext uri="{FF2B5EF4-FFF2-40B4-BE49-F238E27FC236}">
+                <a16:creationId xmlns:a16="http://schemas.microsoft.com/office/drawing/2014/main" id="{4DAB183F-5C81-484A-A865-1920FA7D1719}"/>
+              </a:ext>
+            </a:extLst>
+          </p:cNvPr>
+          <p:cNvSpPr>
+            <a:spLocks xmlns:a="http://schemas.openxmlformats.org/drawingml/2006/main" noGrp="1"/>
+          </p:cNvSpPr>
+          <p:nvPr/>
+        </p:nvSpPr>
+        <p:spPr>
+          <a:xfrm xmlns:a="http://schemas.openxmlformats.org/drawingml/2006/main">
+            <a:off x="5511800" y="5353050"/>
+            <a:ext cx="1714500" cy="914400"/>
+          </a:xfrm>
+          <a:prstGeom xmlns:a="http://schemas.openxmlformats.org/drawingml/2006/main" prst="roundRect">
+            <a:avLst>
+              <a:gd name="adj" fmla="val 12500"/>
+            </a:avLst>
+          </a:prstGeom>
+          <a:solidFill xmlns:a="http://schemas.openxmlformats.org/drawingml/2006/main">
+            <a:srgbClr val="FFFFFF"/>
+          </a:solidFill>
+          <a:ln xmlns:a="http://schemas.openxmlformats.org/drawingml/2006/main" w="9525">
+            <a:solidFill>
+              <a:srgbClr val="BFD4E7"/>
+            </a:solidFill>
+            <a:prstDash val="solid"/>
+          </a:ln>
+        </p:spPr>
+        <p:style>
+          <a:lnRef xmlns:a="http://schemas.openxmlformats.org/drawingml/2006/main" idx="0"/>
+          <a:fillRef xmlns:a="http://schemas.openxmlformats.org/drawingml/2006/main" idx="0"/>
+          <a:effectRef xmlns:a="http://schemas.openxmlformats.org/drawingml/2006/main" idx="4"/>
+          <a:fontRef xmlns:a="http://schemas.openxmlformats.org/drawingml/2006/main" idx="major"/>
+        </p:style>
+      </p:sp>
+      <p:sp>
+        <p:nvSpPr>
+          <p:cNvPr id="29" name="">
+            <a:extLst xmlns:a="http://schemas.openxmlformats.org/drawingml/2006/main">
+              <a:ext uri="{FF2B5EF4-FFF2-40B4-BE49-F238E27FC236}">
+                <a16:creationId xmlns:a16="http://schemas.microsoft.com/office/drawing/2014/main" id="{3746B38D-9545-444B-B1D0-AF964E0DF1D1}"/>
+              </a:ext>
+            </a:extLst>
+          </p:cNvPr>
+          <p:cNvSpPr>
+            <a:spLocks xmlns:a="http://schemas.openxmlformats.org/drawingml/2006/main" noGrp="1"/>
+          </p:cNvSpPr>
+          <p:nvPr/>
+        </p:nvSpPr>
+        <p:spPr>
+          <a:xfrm xmlns:a="http://schemas.openxmlformats.org/drawingml/2006/main">
+            <a:off x="5626100" y="5448300"/>
+            <a:ext cx="1485900" cy="304800"/>
           </a:xfrm>
           <a:prstGeom xmlns:a="http://schemas.openxmlformats.org/drawingml/2006/main" prst="rect">
             <a:avLst/>
@@ -2479,10 +2596,10 @@
           </a:bodyPr>
           <a:lstStyle xmlns:a="http://schemas.openxmlformats.org/drawingml/2006/main"/>
           <a:p xmlns:a="http://schemas.openxmlformats.org/drawingml/2006/main">
-            <a:pPr algn="l">
-              <a:defRPr sz="1425" b="1">
-                <a:solidFill>
-                  <a:srgbClr val="1677C8"/>
+            <a:pPr algn="ctr">
+              <a:defRPr sz="1350" b="1">
+                <a:solidFill>
+                  <a:srgbClr val="00A8D8"/>
                 </a:solidFill>
                 <a:latin typeface="Microsoft YaHei"/>
                 <a:ea typeface="Microsoft YaHei"/>
@@ -2490,37 +2607,37 @@
               </a:defRPr>
             </a:pPr>
             <a:r>
-              <a:rPr sz="1425" b="1">
-                <a:solidFill>
-                  <a:srgbClr val="1677C8"/>
+              <a:rPr sz="1350" b="1">
+                <a:solidFill>
+                  <a:srgbClr val="00A8D8"/>
                 </a:solidFill>
                 <a:latin typeface="Microsoft YaHei"/>
                 <a:ea typeface="Microsoft YaHei"/>
                 <a:cs typeface="Microsoft YaHei"/>
               </a:rPr>
-              <a:t>智能化运营</a:t>
+              <a:t>沉淀组件</a:t>
             </a:r>
           </a:p>
         </p:txBody>
       </p:sp>
       <p:sp>
         <p:nvSpPr>
-          <p:cNvPr id="33" name="">
-            <a:extLst xmlns:a="http://schemas.openxmlformats.org/drawingml/2006/main">
-              <a:ext uri="{FF2B5EF4-FFF2-40B4-BE49-F238E27FC236}">
-                <a16:creationId xmlns:a16="http://schemas.microsoft.com/office/drawing/2014/main" id="{2E984587-8B7A-42A6-BBF2-B011650913CF}"/>
-              </a:ext>
-            </a:extLst>
-          </p:cNvPr>
-          <p:cNvSpPr>
-            <a:spLocks xmlns:a="http://schemas.openxmlformats.org/drawingml/2006/main" noGrp="1"/>
-          </p:cNvSpPr>
-          <p:nvPr/>
-        </p:nvSpPr>
-        <p:spPr>
-          <a:xfrm xmlns:a="http://schemas.openxmlformats.org/drawingml/2006/main">
-            <a:off x="9734550" y="4972050"/>
-            <a:ext cx="1866900" cy="400050"/>
+          <p:cNvPr id="30" name="">
+            <a:extLst xmlns:a="http://schemas.openxmlformats.org/drawingml/2006/main">
+              <a:ext uri="{FF2B5EF4-FFF2-40B4-BE49-F238E27FC236}">
+                <a16:creationId xmlns:a16="http://schemas.microsoft.com/office/drawing/2014/main" id="{0C48921B-7226-4A98-8F8C-C785098F1F53}"/>
+              </a:ext>
+            </a:extLst>
+          </p:cNvPr>
+          <p:cNvSpPr>
+            <a:spLocks xmlns:a="http://schemas.openxmlformats.org/drawingml/2006/main" noGrp="1"/>
+          </p:cNvSpPr>
+          <p:nvPr/>
+        </p:nvSpPr>
+        <p:spPr>
+          <a:xfrm xmlns:a="http://schemas.openxmlformats.org/drawingml/2006/main">
+            <a:off x="5626100" y="5791200"/>
+            <a:ext cx="1485900" cy="381000"/>
           </a:xfrm>
           <a:prstGeom xmlns:a="http://schemas.openxmlformats.org/drawingml/2006/main" prst="rect">
             <a:avLst/>
@@ -2533,14 +2650,136 @@
         </p:spPr>
         <p:txBody>
           <a:bodyPr xmlns:a="http://schemas.openxmlformats.org/drawingml/2006/main" lIns="0" tIns="0" rIns="0" bIns="0" anchor="t">
+            <a:noAutofit/>
+          </a:bodyPr>
+          <a:lstStyle xmlns:a="http://schemas.openxmlformats.org/drawingml/2006/main"/>
+          <a:p xmlns:a="http://schemas.openxmlformats.org/drawingml/2006/main">
+            <a:pPr algn="ctr">
+              <a:defRPr sz="1200" b="0">
+                <a:solidFill>
+                  <a:srgbClr val="475569"/>
+                </a:solidFill>
+                <a:latin typeface="Microsoft YaHei"/>
+                <a:ea typeface="Microsoft YaHei"/>
+                <a:cs typeface="Microsoft YaHei"/>
+              </a:defRPr>
+            </a:pPr>
+            <a:r>
+              <a:rPr sz="1200" b="0">
+                <a:solidFill>
+                  <a:srgbClr val="475569"/>
+                </a:solidFill>
+                <a:latin typeface="Microsoft YaHei"/>
+                <a:ea typeface="Microsoft YaHei"/>
+                <a:cs typeface="Microsoft YaHei"/>
+              </a:rPr>
+              <a:t>积累规则、</a:t>
+            </a:r>
+          </a:p>
+          <a:p xmlns:a="http://schemas.openxmlformats.org/drawingml/2006/main">
+            <a:pPr algn="ctr">
+              <a:defRPr sz="1200" b="0">
+                <a:solidFill>
+                  <a:srgbClr val="475569"/>
+                </a:solidFill>
+                <a:latin typeface="Microsoft YaHei"/>
+                <a:ea typeface="Microsoft YaHei"/>
+                <a:cs typeface="Microsoft YaHei"/>
+              </a:defRPr>
+            </a:pPr>
+            <a:r>
+              <a:rPr sz="1200" b="0">
+                <a:solidFill>
+                  <a:srgbClr val="475569"/>
+                </a:solidFill>
+                <a:latin typeface="Microsoft YaHei"/>
+                <a:ea typeface="Microsoft YaHei"/>
+                <a:cs typeface="Microsoft YaHei"/>
+              </a:rPr>
+              <a:t>资产和运行代码</a:t>
+            </a:r>
+          </a:p>
+        </p:txBody>
+      </p:sp>
+      <p:sp>
+        <p:nvSpPr>
+          <p:cNvPr id="31" name="">
+            <a:extLst xmlns:a="http://schemas.openxmlformats.org/drawingml/2006/main">
+              <a:ext uri="{FF2B5EF4-FFF2-40B4-BE49-F238E27FC236}">
+                <a16:creationId xmlns:a16="http://schemas.microsoft.com/office/drawing/2014/main" id="{A6A983FF-C72E-4E14-AD5E-047365363D7B}"/>
+              </a:ext>
+            </a:extLst>
+          </p:cNvPr>
+          <p:cNvSpPr>
+            <a:spLocks xmlns:a="http://schemas.openxmlformats.org/drawingml/2006/main" noGrp="1"/>
+          </p:cNvSpPr>
+          <p:nvPr/>
+        </p:nvSpPr>
+        <p:spPr>
+          <a:xfrm xmlns:a="http://schemas.openxmlformats.org/drawingml/2006/main" flipH="0" flipV="0">
+            <a:off x="8470900" y="2552700"/>
+            <a:ext cx="0" cy="2724150"/>
+          </a:xfrm>
+          <a:prstGeom xmlns:a="http://schemas.openxmlformats.org/drawingml/2006/main" prst="line">
+            <a:avLst/>
+          </a:prstGeom>
+          <a:noFill xmlns:a="http://schemas.openxmlformats.org/drawingml/2006/main"/>
+          <a:ln xmlns:a="http://schemas.openxmlformats.org/drawingml/2006/main" w="9525">
+            <a:solidFill>
+              <a:srgbClr val="C2CEDB"/>
+            </a:solidFill>
+            <a:prstDash val="solid"/>
+          </a:ln>
+        </p:spPr>
+      </p:sp>
+      <p:sp>
+        <p:nvSpPr>
+          <p:cNvPr id="32" name="">
+            <a:extLst xmlns:a="http://schemas.openxmlformats.org/drawingml/2006/main">
+              <a:ext uri="{FF2B5EF4-FFF2-40B4-BE49-F238E27FC236}">
+                <a16:creationId xmlns:a16="http://schemas.microsoft.com/office/drawing/2014/main" id="{CADD7004-16A6-4B7D-B1A8-013EEED7B0D6}"/>
+              </a:ext>
+            </a:extLst>
+          </p:cNvPr>
+          <p:cNvSpPr>
+            <a:spLocks xmlns:a="http://schemas.openxmlformats.org/drawingml/2006/main" noGrp="1"/>
+          </p:cNvSpPr>
+          <p:nvPr/>
+        </p:nvSpPr>
+        <p:spPr>
+          <a:xfrm xmlns:a="http://schemas.openxmlformats.org/drawingml/2006/main">
+            <a:off x="8261350" y="2800350"/>
+            <a:ext cx="419100" cy="419100"/>
+          </a:xfrm>
+          <a:prstGeom xmlns:a="http://schemas.openxmlformats.org/drawingml/2006/main" prst="ellipse">
+            <a:avLst/>
+          </a:prstGeom>
+          <a:solidFill xmlns:a="http://schemas.openxmlformats.org/drawingml/2006/main">
+            <a:srgbClr val="FFFFFF"/>
+          </a:solidFill>
+          <a:ln xmlns:a="http://schemas.openxmlformats.org/drawingml/2006/main" w="28575">
+            <a:solidFill>
+              <a:srgbClr val="1677C8"/>
+            </a:solidFill>
+            <a:prstDash val="solid"/>
+          </a:ln>
+        </p:spPr>
+        <p:style>
+          <a:lnRef xmlns:a="http://schemas.openxmlformats.org/drawingml/2006/main" idx="0"/>
+          <a:fillRef xmlns:a="http://schemas.openxmlformats.org/drawingml/2006/main" idx="0"/>
+          <a:effectRef xmlns:a="http://schemas.openxmlformats.org/drawingml/2006/main" idx="4"/>
+          <a:fontRef xmlns:a="http://schemas.openxmlformats.org/drawingml/2006/main" idx="major"/>
+        </p:style>
+        <p:txBody>
+          <a:bodyPr xmlns:a="http://schemas.openxmlformats.org/drawingml/2006/main" lIns="0" tIns="0" rIns="0" bIns="0" anchor="ctr">
             <a:normAutofit fontScale="100000"/>
           </a:bodyPr>
           <a:lstStyle xmlns:a="http://schemas.openxmlformats.org/drawingml/2006/main"/>
           <a:p xmlns:a="http://schemas.openxmlformats.org/drawingml/2006/main">
-            <a:pPr algn="l">
-              <a:defRPr sz="975" b="0">
-                <a:solidFill>
-                  <a:srgbClr val="475569"/>
+            <a:pPr algn="ctr">
+              <a:defRPr sz="1200" b="1">
+                <a:solidFill>
+                  <a:srgbClr val="1677C8"/>
                 </a:solidFill>
                 <a:latin typeface="Microsoft YaHei"/>
                 <a:ea typeface="Microsoft YaHei"/>
@@ -2548,37 +2787,566 @@
               </a:defRPr>
             </a:pPr>
             <a:r>
-              <a:rPr sz="975" b="0">
-                <a:solidFill>
-                  <a:srgbClr val="475569"/>
+              <a:rPr sz="1200" b="1">
+                <a:solidFill>
+                  <a:srgbClr val="1677C8"/>
                 </a:solidFill>
                 <a:latin typeface="Microsoft YaHei"/>
                 <a:ea typeface="Microsoft YaHei"/>
                 <a:cs typeface="Microsoft YaHei"/>
               </a:rPr>
-              <a:t>业务策略与自动化能力协同演进</a:t>
+              <a:t>03</a:t>
             </a:r>
           </a:p>
         </p:txBody>
       </p:sp>
       <p:sp>
         <p:nvSpPr>
+          <p:cNvPr id="33" name="">
+            <a:extLst xmlns:a="http://schemas.openxmlformats.org/drawingml/2006/main">
+              <a:ext uri="{FF2B5EF4-FFF2-40B4-BE49-F238E27FC236}">
+                <a16:creationId xmlns:a16="http://schemas.microsoft.com/office/drawing/2014/main" id="{092D8B8A-5FBB-48C4-911D-DFA0AC0637F2}"/>
+              </a:ext>
+            </a:extLst>
+          </p:cNvPr>
+          <p:cNvSpPr>
+            <a:spLocks xmlns:a="http://schemas.openxmlformats.org/drawingml/2006/main" noGrp="1"/>
+          </p:cNvSpPr>
+          <p:nvPr/>
+        </p:nvSpPr>
+        <p:spPr>
+          <a:xfrm xmlns:a="http://schemas.openxmlformats.org/drawingml/2006/main">
+            <a:off x="8261350" y="4610100"/>
+            <a:ext cx="419100" cy="419100"/>
+          </a:xfrm>
+          <a:prstGeom xmlns:a="http://schemas.openxmlformats.org/drawingml/2006/main" prst="ellipse">
+            <a:avLst/>
+          </a:prstGeom>
+          <a:solidFill xmlns:a="http://schemas.openxmlformats.org/drawingml/2006/main">
+            <a:srgbClr val="FFFFFF"/>
+          </a:solidFill>
+          <a:ln xmlns:a="http://schemas.openxmlformats.org/drawingml/2006/main" w="28575">
+            <a:solidFill>
+              <a:srgbClr val="00A8D8"/>
+            </a:solidFill>
+            <a:prstDash val="solid"/>
+          </a:ln>
+        </p:spPr>
+        <p:style>
+          <a:lnRef xmlns:a="http://schemas.openxmlformats.org/drawingml/2006/main" idx="0"/>
+          <a:fillRef xmlns:a="http://schemas.openxmlformats.org/drawingml/2006/main" idx="0"/>
+          <a:effectRef xmlns:a="http://schemas.openxmlformats.org/drawingml/2006/main" idx="4"/>
+          <a:fontRef xmlns:a="http://schemas.openxmlformats.org/drawingml/2006/main" idx="major"/>
+        </p:style>
+        <p:txBody>
+          <a:bodyPr xmlns:a="http://schemas.openxmlformats.org/drawingml/2006/main" lIns="0" tIns="0" rIns="0" bIns="0" anchor="ctr">
+            <a:normAutofit fontScale="100000"/>
+          </a:bodyPr>
+          <a:lstStyle xmlns:a="http://schemas.openxmlformats.org/drawingml/2006/main"/>
+          <a:p xmlns:a="http://schemas.openxmlformats.org/drawingml/2006/main">
+            <a:pPr algn="ctr">
+              <a:defRPr sz="1200" b="1">
+                <a:solidFill>
+                  <a:srgbClr val="00A8D8"/>
+                </a:solidFill>
+                <a:latin typeface="Microsoft YaHei"/>
+                <a:ea typeface="Microsoft YaHei"/>
+                <a:cs typeface="Microsoft YaHei"/>
+              </a:defRPr>
+            </a:pPr>
+            <a:r>
+              <a:rPr sz="1200" b="1">
+                <a:solidFill>
+                  <a:srgbClr val="00A8D8"/>
+                </a:solidFill>
+                <a:latin typeface="Microsoft YaHei"/>
+                <a:ea typeface="Microsoft YaHei"/>
+                <a:cs typeface="Microsoft YaHei"/>
+              </a:rPr>
+              <a:t>03</a:t>
+            </a:r>
+          </a:p>
+        </p:txBody>
+      </p:sp>
+      <p:sp>
+        <p:nvSpPr>
           <p:cNvPr id="34" name="">
             <a:extLst xmlns:a="http://schemas.openxmlformats.org/drawingml/2006/main">
               <a:ext uri="{FF2B5EF4-FFF2-40B4-BE49-F238E27FC236}">
-                <a16:creationId xmlns:a16="http://schemas.microsoft.com/office/drawing/2014/main" id="{84A3CDF7-1BAB-42C1-B432-0E42106E2C25}"/>
-              </a:ext>
-            </a:extLst>
-          </p:cNvPr>
-          <p:cNvSpPr>
-            <a:spLocks xmlns:a="http://schemas.openxmlformats.org/drawingml/2006/main" noGrp="1"/>
-          </p:cNvSpPr>
-          <p:nvPr/>
-        </p:nvSpPr>
-        <p:spPr>
-          <a:xfrm xmlns:a="http://schemas.openxmlformats.org/drawingml/2006/main">
-            <a:off x="10972800" y="3638550"/>
-            <a:ext cx="152400" cy="152400"/>
+                <a16:creationId xmlns:a16="http://schemas.microsoft.com/office/drawing/2014/main" id="{B888F790-9646-4053-A1B4-5BBACF11CD6A}"/>
+              </a:ext>
+            </a:extLst>
+          </p:cNvPr>
+          <p:cNvSpPr>
+            <a:spLocks xmlns:a="http://schemas.openxmlformats.org/drawingml/2006/main" noGrp="1"/>
+          </p:cNvSpPr>
+          <p:nvPr/>
+        </p:nvSpPr>
+        <p:spPr>
+          <a:xfrm xmlns:a="http://schemas.openxmlformats.org/drawingml/2006/main">
+            <a:off x="8032750" y="3562350"/>
+            <a:ext cx="876300" cy="342900"/>
+          </a:xfrm>
+          <a:prstGeom xmlns:a="http://schemas.openxmlformats.org/drawingml/2006/main" prst="roundRect">
+            <a:avLst>
+              <a:gd name="adj" fmla="val 33333"/>
+            </a:avLst>
+          </a:prstGeom>
+          <a:solidFill xmlns:a="http://schemas.openxmlformats.org/drawingml/2006/main">
+            <a:srgbClr val="FFFFFF"/>
+          </a:solidFill>
+          <a:ln xmlns:a="http://schemas.openxmlformats.org/drawingml/2006/main" w="9525">
+            <a:solidFill>
+              <a:srgbClr val="D6E1EC"/>
+            </a:solidFill>
+            <a:prstDash val="solid"/>
+          </a:ln>
+        </p:spPr>
+        <p:style>
+          <a:lnRef xmlns:a="http://schemas.openxmlformats.org/drawingml/2006/main" idx="0"/>
+          <a:fillRef xmlns:a="http://schemas.openxmlformats.org/drawingml/2006/main" idx="0"/>
+          <a:effectRef xmlns:a="http://schemas.openxmlformats.org/drawingml/2006/main" idx="4"/>
+          <a:fontRef xmlns:a="http://schemas.openxmlformats.org/drawingml/2006/main" idx="major"/>
+        </p:style>
+        <p:txBody>
+          <a:bodyPr xmlns:a="http://schemas.openxmlformats.org/drawingml/2006/main" lIns="38100" tIns="9525" rIns="38100" bIns="9525" anchor="ctr">
+            <a:normAutofit fontScale="100000"/>
+          </a:bodyPr>
+          <a:lstStyle xmlns:a="http://schemas.openxmlformats.org/drawingml/2006/main"/>
+          <a:p xmlns:a="http://schemas.openxmlformats.org/drawingml/2006/main">
+            <a:pPr algn="ctr">
+              <a:defRPr sz="1200" b="1">
+                <a:solidFill>
+                  <a:srgbClr val="D99923"/>
+                </a:solidFill>
+                <a:latin typeface="Microsoft YaHei"/>
+                <a:ea typeface="Microsoft YaHei"/>
+                <a:cs typeface="Microsoft YaHei"/>
+              </a:defRPr>
+            </a:pPr>
+            <a:r>
+              <a:rPr sz="1200" b="1">
+                <a:solidFill>
+                  <a:srgbClr val="D99923"/>
+                </a:solidFill>
+                <a:latin typeface="Microsoft YaHei"/>
+                <a:ea typeface="Microsoft YaHei"/>
+                <a:cs typeface="Microsoft YaHei"/>
+              </a:rPr>
+              <a:t>2027</a:t>
+            </a:r>
+          </a:p>
+        </p:txBody>
+      </p:sp>
+      <p:sp>
+        <p:nvSpPr>
+          <p:cNvPr id="35" name="PPAGENT_QA|parent=dual-track-a-2|domains=dual-track-a-cards">
+            <a:extLst xmlns:a="http://schemas.openxmlformats.org/drawingml/2006/main">
+              <a:ext uri="{FF2B5EF4-FFF2-40B4-BE49-F238E27FC236}">
+                <a16:creationId xmlns:a16="http://schemas.microsoft.com/office/drawing/2014/main" id="{AFDCC88A-A761-45B8-9F0C-6C883B564815}"/>
+              </a:ext>
+            </a:extLst>
+          </p:cNvPr>
+          <p:cNvSpPr>
+            <a:spLocks xmlns:a="http://schemas.openxmlformats.org/drawingml/2006/main" noGrp="1"/>
+          </p:cNvSpPr>
+          <p:nvPr/>
+        </p:nvSpPr>
+        <p:spPr>
+          <a:xfrm xmlns:a="http://schemas.openxmlformats.org/drawingml/2006/main">
+            <a:off x="7613650" y="1390650"/>
+            <a:ext cx="1714500" cy="1066800"/>
+          </a:xfrm>
+          <a:prstGeom xmlns:a="http://schemas.openxmlformats.org/drawingml/2006/main" prst="roundRect">
+            <a:avLst>
+              <a:gd name="adj" fmla="val 10714"/>
+            </a:avLst>
+          </a:prstGeom>
+          <a:solidFill xmlns:a="http://schemas.openxmlformats.org/drawingml/2006/main">
+            <a:srgbClr val="FFFFFF"/>
+          </a:solidFill>
+          <a:ln xmlns:a="http://schemas.openxmlformats.org/drawingml/2006/main" w="9525">
+            <a:solidFill>
+              <a:srgbClr val="BFD4E7"/>
+            </a:solidFill>
+            <a:prstDash val="solid"/>
+          </a:ln>
+        </p:spPr>
+        <p:style>
+          <a:lnRef xmlns:a="http://schemas.openxmlformats.org/drawingml/2006/main" idx="0"/>
+          <a:fillRef xmlns:a="http://schemas.openxmlformats.org/drawingml/2006/main" idx="0"/>
+          <a:effectRef xmlns:a="http://schemas.openxmlformats.org/drawingml/2006/main" idx="4"/>
+          <a:fontRef xmlns:a="http://schemas.openxmlformats.org/drawingml/2006/main" idx="major"/>
+        </p:style>
+      </p:sp>
+      <p:sp>
+        <p:nvSpPr>
+          <p:cNvPr id="36" name="">
+            <a:extLst xmlns:a="http://schemas.openxmlformats.org/drawingml/2006/main">
+              <a:ext uri="{FF2B5EF4-FFF2-40B4-BE49-F238E27FC236}">
+                <a16:creationId xmlns:a16="http://schemas.microsoft.com/office/drawing/2014/main" id="{C0335887-1B72-4952-B0C6-289B8E60EF2A}"/>
+              </a:ext>
+            </a:extLst>
+          </p:cNvPr>
+          <p:cNvSpPr>
+            <a:spLocks xmlns:a="http://schemas.openxmlformats.org/drawingml/2006/main" noGrp="1"/>
+          </p:cNvSpPr>
+          <p:nvPr/>
+        </p:nvSpPr>
+        <p:spPr>
+          <a:xfrm xmlns:a="http://schemas.openxmlformats.org/drawingml/2006/main">
+            <a:off x="7727950" y="1504950"/>
+            <a:ext cx="1485900" cy="323850"/>
+          </a:xfrm>
+          <a:prstGeom xmlns:a="http://schemas.openxmlformats.org/drawingml/2006/main" prst="rect">
+            <a:avLst/>
+          </a:prstGeom>
+          <a:noFill xmlns:a="http://schemas.openxmlformats.org/drawingml/2006/main"/>
+          <a:ln xmlns:a="http://schemas.openxmlformats.org/drawingml/2006/main" w="0">
+            <a:noFill/>
+            <a:prstDash val="solid"/>
+          </a:ln>
+        </p:spPr>
+        <p:txBody>
+          <a:bodyPr xmlns:a="http://schemas.openxmlformats.org/drawingml/2006/main" lIns="0" tIns="0" rIns="0" bIns="0" anchor="ctr">
+            <a:normAutofit fontScale="100000"/>
+          </a:bodyPr>
+          <a:lstStyle xmlns:a="http://schemas.openxmlformats.org/drawingml/2006/main"/>
+          <a:p xmlns:a="http://schemas.openxmlformats.org/drawingml/2006/main">
+            <a:pPr algn="ctr">
+              <a:defRPr sz="1350" b="1">
+                <a:solidFill>
+                  <a:srgbClr val="1677C8"/>
+                </a:solidFill>
+                <a:latin typeface="Microsoft YaHei"/>
+                <a:ea typeface="Microsoft YaHei"/>
+                <a:cs typeface="Microsoft YaHei"/>
+              </a:defRPr>
+            </a:pPr>
+            <a:r>
+              <a:rPr sz="1350" b="1">
+                <a:solidFill>
+                  <a:srgbClr val="1677C8"/>
+                </a:solidFill>
+                <a:latin typeface="Microsoft YaHei"/>
+                <a:ea typeface="Microsoft YaHei"/>
+                <a:cs typeface="Microsoft YaHei"/>
+              </a:rPr>
+              <a:t>扩展场景</a:t>
+            </a:r>
+          </a:p>
+        </p:txBody>
+      </p:sp>
+      <p:sp>
+        <p:nvSpPr>
+          <p:cNvPr id="37" name="">
+            <a:extLst xmlns:a="http://schemas.openxmlformats.org/drawingml/2006/main">
+              <a:ext uri="{FF2B5EF4-FFF2-40B4-BE49-F238E27FC236}">
+                <a16:creationId xmlns:a16="http://schemas.microsoft.com/office/drawing/2014/main" id="{8C5E8785-4D3E-404D-A45D-DF470C97928D}"/>
+              </a:ext>
+            </a:extLst>
+          </p:cNvPr>
+          <p:cNvSpPr>
+            <a:spLocks xmlns:a="http://schemas.openxmlformats.org/drawingml/2006/main" noGrp="1"/>
+          </p:cNvSpPr>
+          <p:nvPr/>
+        </p:nvSpPr>
+        <p:spPr>
+          <a:xfrm xmlns:a="http://schemas.openxmlformats.org/drawingml/2006/main">
+            <a:off x="7727950" y="1885950"/>
+            <a:ext cx="1485900" cy="457200"/>
+          </a:xfrm>
+          <a:prstGeom xmlns:a="http://schemas.openxmlformats.org/drawingml/2006/main" prst="rect">
+            <a:avLst/>
+          </a:prstGeom>
+          <a:noFill xmlns:a="http://schemas.openxmlformats.org/drawingml/2006/main"/>
+          <a:ln xmlns:a="http://schemas.openxmlformats.org/drawingml/2006/main" w="0">
+            <a:noFill/>
+            <a:prstDash val="solid"/>
+          </a:ln>
+        </p:spPr>
+        <p:txBody>
+          <a:bodyPr xmlns:a="http://schemas.openxmlformats.org/drawingml/2006/main" lIns="0" tIns="0" rIns="0" bIns="0" anchor="t">
+            <a:noAutofit/>
+          </a:bodyPr>
+          <a:lstStyle xmlns:a="http://schemas.openxmlformats.org/drawingml/2006/main"/>
+          <a:p xmlns:a="http://schemas.openxmlformats.org/drawingml/2006/main">
+            <a:pPr algn="ctr">
+              <a:defRPr sz="1200" b="0">
+                <a:solidFill>
+                  <a:srgbClr val="475569"/>
+                </a:solidFill>
+                <a:latin typeface="Microsoft YaHei"/>
+                <a:ea typeface="Microsoft YaHei"/>
+                <a:cs typeface="Microsoft YaHei"/>
+              </a:defRPr>
+            </a:pPr>
+            <a:r>
+              <a:rPr sz="1200" b="0">
+                <a:solidFill>
+                  <a:srgbClr val="475569"/>
+                </a:solidFill>
+                <a:latin typeface="Microsoft YaHei"/>
+                <a:ea typeface="Microsoft YaHei"/>
+                <a:cs typeface="Microsoft YaHei"/>
+              </a:rPr>
+              <a:t>支持更多组织</a:t>
+            </a:r>
+          </a:p>
+          <a:p xmlns:a="http://schemas.openxmlformats.org/drawingml/2006/main">
+            <a:pPr algn="ctr">
+              <a:defRPr sz="1200" b="0">
+                <a:solidFill>
+                  <a:srgbClr val="475569"/>
+                </a:solidFill>
+                <a:latin typeface="Microsoft YaHei"/>
+                <a:ea typeface="Microsoft YaHei"/>
+                <a:cs typeface="Microsoft YaHei"/>
+              </a:defRPr>
+            </a:pPr>
+            <a:r>
+              <a:rPr sz="1200" b="0">
+                <a:solidFill>
+                  <a:srgbClr val="475569"/>
+                </a:solidFill>
+                <a:latin typeface="Microsoft YaHei"/>
+                <a:ea typeface="Microsoft YaHei"/>
+                <a:cs typeface="Microsoft YaHei"/>
+              </a:rPr>
+              <a:t>与汇报用途</a:t>
+            </a:r>
+          </a:p>
+        </p:txBody>
+      </p:sp>
+      <p:sp>
+        <p:nvSpPr>
+          <p:cNvPr id="38" name="PPAGENT_QA|parent=dual-track-b-2|domains=dual-track-b-cards">
+            <a:extLst xmlns:a="http://schemas.openxmlformats.org/drawingml/2006/main">
+              <a:ext uri="{FF2B5EF4-FFF2-40B4-BE49-F238E27FC236}">
+                <a16:creationId xmlns:a16="http://schemas.microsoft.com/office/drawing/2014/main" id="{4285DB1F-0DA7-4B37-99D9-36ECDE323589}"/>
+              </a:ext>
+            </a:extLst>
+          </p:cNvPr>
+          <p:cNvSpPr>
+            <a:spLocks xmlns:a="http://schemas.openxmlformats.org/drawingml/2006/main" noGrp="1"/>
+          </p:cNvSpPr>
+          <p:nvPr/>
+        </p:nvSpPr>
+        <p:spPr>
+          <a:xfrm xmlns:a="http://schemas.openxmlformats.org/drawingml/2006/main">
+            <a:off x="7613650" y="5353050"/>
+            <a:ext cx="1714500" cy="914400"/>
+          </a:xfrm>
+          <a:prstGeom xmlns:a="http://schemas.openxmlformats.org/drawingml/2006/main" prst="roundRect">
+            <a:avLst>
+              <a:gd name="adj" fmla="val 12500"/>
+            </a:avLst>
+          </a:prstGeom>
+          <a:solidFill xmlns:a="http://schemas.openxmlformats.org/drawingml/2006/main">
+            <a:srgbClr val="FFFFFF"/>
+          </a:solidFill>
+          <a:ln xmlns:a="http://schemas.openxmlformats.org/drawingml/2006/main" w="9525">
+            <a:solidFill>
+              <a:srgbClr val="BFD4E7"/>
+            </a:solidFill>
+            <a:prstDash val="solid"/>
+          </a:ln>
+        </p:spPr>
+        <p:style>
+          <a:lnRef xmlns:a="http://schemas.openxmlformats.org/drawingml/2006/main" idx="0"/>
+          <a:fillRef xmlns:a="http://schemas.openxmlformats.org/drawingml/2006/main" idx="0"/>
+          <a:effectRef xmlns:a="http://schemas.openxmlformats.org/drawingml/2006/main" idx="4"/>
+          <a:fontRef xmlns:a="http://schemas.openxmlformats.org/drawingml/2006/main" idx="major"/>
+        </p:style>
+      </p:sp>
+      <p:sp>
+        <p:nvSpPr>
+          <p:cNvPr id="39" name="">
+            <a:extLst xmlns:a="http://schemas.openxmlformats.org/drawingml/2006/main">
+              <a:ext uri="{FF2B5EF4-FFF2-40B4-BE49-F238E27FC236}">
+                <a16:creationId xmlns:a16="http://schemas.microsoft.com/office/drawing/2014/main" id="{6E35E635-3B86-4F4A-92ED-7B4AB0B82BB4}"/>
+              </a:ext>
+            </a:extLst>
+          </p:cNvPr>
+          <p:cNvSpPr>
+            <a:spLocks xmlns:a="http://schemas.openxmlformats.org/drawingml/2006/main" noGrp="1"/>
+          </p:cNvSpPr>
+          <p:nvPr/>
+        </p:nvSpPr>
+        <p:spPr>
+          <a:xfrm xmlns:a="http://schemas.openxmlformats.org/drawingml/2006/main">
+            <a:off x="7727950" y="5448300"/>
+            <a:ext cx="1485900" cy="304800"/>
+          </a:xfrm>
+          <a:prstGeom xmlns:a="http://schemas.openxmlformats.org/drawingml/2006/main" prst="rect">
+            <a:avLst/>
+          </a:prstGeom>
+          <a:noFill xmlns:a="http://schemas.openxmlformats.org/drawingml/2006/main"/>
+          <a:ln xmlns:a="http://schemas.openxmlformats.org/drawingml/2006/main" w="0">
+            <a:noFill/>
+            <a:prstDash val="solid"/>
+          </a:ln>
+        </p:spPr>
+        <p:txBody>
+          <a:bodyPr xmlns:a="http://schemas.openxmlformats.org/drawingml/2006/main" lIns="0" tIns="0" rIns="0" bIns="0" anchor="ctr">
+            <a:normAutofit fontScale="100000"/>
+          </a:bodyPr>
+          <a:lstStyle xmlns:a="http://schemas.openxmlformats.org/drawingml/2006/main"/>
+          <a:p xmlns:a="http://schemas.openxmlformats.org/drawingml/2006/main">
+            <a:pPr algn="ctr">
+              <a:defRPr sz="1350" b="1">
+                <a:solidFill>
+                  <a:srgbClr val="00A8D8"/>
+                </a:solidFill>
+                <a:latin typeface="Microsoft YaHei"/>
+                <a:ea typeface="Microsoft YaHei"/>
+                <a:cs typeface="Microsoft YaHei"/>
+              </a:defRPr>
+            </a:pPr>
+            <a:r>
+              <a:rPr sz="1350" b="1">
+                <a:solidFill>
+                  <a:srgbClr val="00A8D8"/>
+                </a:solidFill>
+                <a:latin typeface="Microsoft YaHei"/>
+                <a:ea typeface="Microsoft YaHei"/>
+                <a:cs typeface="Microsoft YaHei"/>
+              </a:rPr>
+              <a:t>统一内核</a:t>
+            </a:r>
+          </a:p>
+        </p:txBody>
+      </p:sp>
+      <p:sp>
+        <p:nvSpPr>
+          <p:cNvPr id="40" name="">
+            <a:extLst xmlns:a="http://schemas.openxmlformats.org/drawingml/2006/main">
+              <a:ext uri="{FF2B5EF4-FFF2-40B4-BE49-F238E27FC236}">
+                <a16:creationId xmlns:a16="http://schemas.microsoft.com/office/drawing/2014/main" id="{423757B8-5483-49EB-94B1-6AF66FD51F90}"/>
+              </a:ext>
+            </a:extLst>
+          </p:cNvPr>
+          <p:cNvSpPr>
+            <a:spLocks xmlns:a="http://schemas.openxmlformats.org/drawingml/2006/main" noGrp="1"/>
+          </p:cNvSpPr>
+          <p:nvPr/>
+        </p:nvSpPr>
+        <p:spPr>
+          <a:xfrm xmlns:a="http://schemas.openxmlformats.org/drawingml/2006/main">
+            <a:off x="7727950" y="5791200"/>
+            <a:ext cx="1485900" cy="381000"/>
+          </a:xfrm>
+          <a:prstGeom xmlns:a="http://schemas.openxmlformats.org/drawingml/2006/main" prst="rect">
+            <a:avLst/>
+          </a:prstGeom>
+          <a:noFill xmlns:a="http://schemas.openxmlformats.org/drawingml/2006/main"/>
+          <a:ln xmlns:a="http://schemas.openxmlformats.org/drawingml/2006/main" w="0">
+            <a:noFill/>
+            <a:prstDash val="solid"/>
+          </a:ln>
+        </p:spPr>
+        <p:txBody>
+          <a:bodyPr xmlns:a="http://schemas.openxmlformats.org/drawingml/2006/main" lIns="0" tIns="0" rIns="0" bIns="0" anchor="t">
+            <a:noAutofit/>
+          </a:bodyPr>
+          <a:lstStyle xmlns:a="http://schemas.openxmlformats.org/drawingml/2006/main"/>
+          <a:p xmlns:a="http://schemas.openxmlformats.org/drawingml/2006/main">
+            <a:pPr algn="ctr">
+              <a:defRPr sz="1200" b="0">
+                <a:solidFill>
+                  <a:srgbClr val="475569"/>
+                </a:solidFill>
+                <a:latin typeface="Microsoft YaHei"/>
+                <a:ea typeface="Microsoft YaHei"/>
+                <a:cs typeface="Microsoft YaHei"/>
+              </a:defRPr>
+            </a:pPr>
+            <a:r>
+              <a:rPr sz="1200" b="0">
+                <a:solidFill>
+                  <a:srgbClr val="475569"/>
+                </a:solidFill>
+                <a:latin typeface="Microsoft YaHei"/>
+                <a:ea typeface="Microsoft YaHei"/>
+                <a:cs typeface="Microsoft YaHei"/>
+              </a:rPr>
+              <a:t>复用共同契约</a:t>
+            </a:r>
+          </a:p>
+          <a:p xmlns:a="http://schemas.openxmlformats.org/drawingml/2006/main">
+            <a:pPr algn="ctr">
+              <a:defRPr sz="1200" b="0">
+                <a:solidFill>
+                  <a:srgbClr val="475569"/>
+                </a:solidFill>
+                <a:latin typeface="Microsoft YaHei"/>
+                <a:ea typeface="Microsoft YaHei"/>
+                <a:cs typeface="Microsoft YaHei"/>
+              </a:defRPr>
+            </a:pPr>
+            <a:r>
+              <a:rPr sz="1200" b="0">
+                <a:solidFill>
+                  <a:srgbClr val="475569"/>
+                </a:solidFill>
+                <a:latin typeface="Microsoft YaHei"/>
+                <a:ea typeface="Microsoft YaHei"/>
+                <a:cs typeface="Microsoft YaHei"/>
+              </a:rPr>
+              <a:t>与质量门禁</a:t>
+            </a:r>
+          </a:p>
+        </p:txBody>
+      </p:sp>
+      <p:sp>
+        <p:nvSpPr>
+          <p:cNvPr id="41" name="">
+            <a:extLst xmlns:a="http://schemas.openxmlformats.org/drawingml/2006/main">
+              <a:ext uri="{FF2B5EF4-FFF2-40B4-BE49-F238E27FC236}">
+                <a16:creationId xmlns:a16="http://schemas.microsoft.com/office/drawing/2014/main" id="{87E4D32D-BDA5-4924-AF88-E5E0C07F8946}"/>
+              </a:ext>
+            </a:extLst>
+          </p:cNvPr>
+          <p:cNvSpPr>
+            <a:spLocks xmlns:a="http://schemas.openxmlformats.org/drawingml/2006/main" noGrp="1"/>
+          </p:cNvSpPr>
+          <p:nvPr/>
+        </p:nvSpPr>
+        <p:spPr>
+          <a:xfrm xmlns:a="http://schemas.openxmlformats.org/drawingml/2006/main" flipH="0" flipV="0">
+            <a:off x="10572750" y="2552700"/>
+            <a:ext cx="0" cy="2724150"/>
+          </a:xfrm>
+          <a:prstGeom xmlns:a="http://schemas.openxmlformats.org/drawingml/2006/main" prst="line">
+            <a:avLst/>
+          </a:prstGeom>
+          <a:noFill xmlns:a="http://schemas.openxmlformats.org/drawingml/2006/main"/>
+          <a:ln xmlns:a="http://schemas.openxmlformats.org/drawingml/2006/main" w="9525">
+            <a:solidFill>
+              <a:srgbClr val="C2CEDB"/>
+            </a:solidFill>
+            <a:prstDash val="solid"/>
+          </a:ln>
+        </p:spPr>
+      </p:sp>
+      <p:sp>
+        <p:nvSpPr>
+          <p:cNvPr id="42" name="">
+            <a:extLst xmlns:a="http://schemas.openxmlformats.org/drawingml/2006/main">
+              <a:ext uri="{FF2B5EF4-FFF2-40B4-BE49-F238E27FC236}">
+                <a16:creationId xmlns:a16="http://schemas.microsoft.com/office/drawing/2014/main" id="{0D45AAE7-67C2-4AB3-B3D2-2D68A3B115A0}"/>
+              </a:ext>
+            </a:extLst>
+          </p:cNvPr>
+          <p:cNvSpPr>
+            <a:spLocks xmlns:a="http://schemas.openxmlformats.org/drawingml/2006/main" noGrp="1"/>
+          </p:cNvSpPr>
+          <p:nvPr/>
+        </p:nvSpPr>
+        <p:spPr>
+          <a:xfrm xmlns:a="http://schemas.openxmlformats.org/drawingml/2006/main">
+            <a:off x="10363200" y="2800350"/>
+            <a:ext cx="419100" cy="419100"/>
           </a:xfrm>
           <a:prstGeom xmlns:a="http://schemas.openxmlformats.org/drawingml/2006/main" prst="ellipse">
             <a:avLst/>
@@ -2593,11 +3361,544 @@
             <a:prstDash val="solid"/>
           </a:ln>
         </p:spPr>
+        <p:style>
+          <a:lnRef xmlns:a="http://schemas.openxmlformats.org/drawingml/2006/main" idx="0"/>
+          <a:fillRef xmlns:a="http://schemas.openxmlformats.org/drawingml/2006/main" idx="0"/>
+          <a:effectRef xmlns:a="http://schemas.openxmlformats.org/drawingml/2006/main" idx="4"/>
+          <a:fontRef xmlns:a="http://schemas.openxmlformats.org/drawingml/2006/main" idx="major"/>
+        </p:style>
+        <p:txBody>
+          <a:bodyPr xmlns:a="http://schemas.openxmlformats.org/drawingml/2006/main" lIns="0" tIns="0" rIns="0" bIns="0" anchor="ctr">
+            <a:normAutofit fontScale="100000"/>
+          </a:bodyPr>
+          <a:lstStyle xmlns:a="http://schemas.openxmlformats.org/drawingml/2006/main"/>
+          <a:p xmlns:a="http://schemas.openxmlformats.org/drawingml/2006/main">
+            <a:pPr algn="ctr">
+              <a:defRPr sz="1200" b="1">
+                <a:solidFill>
+                  <a:srgbClr val="1677C8"/>
+                </a:solidFill>
+                <a:latin typeface="Microsoft YaHei"/>
+                <a:ea typeface="Microsoft YaHei"/>
+                <a:cs typeface="Microsoft YaHei"/>
+              </a:defRPr>
+            </a:pPr>
+            <a:r>
+              <a:rPr sz="1200" b="1">
+                <a:solidFill>
+                  <a:srgbClr val="1677C8"/>
+                </a:solidFill>
+                <a:latin typeface="Microsoft YaHei"/>
+                <a:ea typeface="Microsoft YaHei"/>
+                <a:cs typeface="Microsoft YaHei"/>
+              </a:rPr>
+              <a:t>04</a:t>
+            </a:r>
+          </a:p>
+        </p:txBody>
+      </p:sp>
+      <p:sp>
+        <p:nvSpPr>
+          <p:cNvPr id="43" name="">
+            <a:extLst xmlns:a="http://schemas.openxmlformats.org/drawingml/2006/main">
+              <a:ext uri="{FF2B5EF4-FFF2-40B4-BE49-F238E27FC236}">
+                <a16:creationId xmlns:a16="http://schemas.microsoft.com/office/drawing/2014/main" id="{190B56FD-BDDD-4236-B7DB-7B1022416556}"/>
+              </a:ext>
+            </a:extLst>
+          </p:cNvPr>
+          <p:cNvSpPr>
+            <a:spLocks xmlns:a="http://schemas.openxmlformats.org/drawingml/2006/main" noGrp="1"/>
+          </p:cNvSpPr>
+          <p:nvPr/>
+        </p:nvSpPr>
+        <p:spPr>
+          <a:xfrm xmlns:a="http://schemas.openxmlformats.org/drawingml/2006/main">
+            <a:off x="10363200" y="4610100"/>
+            <a:ext cx="419100" cy="419100"/>
+          </a:xfrm>
+          <a:prstGeom xmlns:a="http://schemas.openxmlformats.org/drawingml/2006/main" prst="ellipse">
+            <a:avLst/>
+          </a:prstGeom>
+          <a:solidFill xmlns:a="http://schemas.openxmlformats.org/drawingml/2006/main">
+            <a:srgbClr val="FFFFFF"/>
+          </a:solidFill>
+          <a:ln xmlns:a="http://schemas.openxmlformats.org/drawingml/2006/main" w="28575">
+            <a:solidFill>
+              <a:srgbClr val="00A8D8"/>
+            </a:solidFill>
+            <a:prstDash val="solid"/>
+          </a:ln>
+        </p:spPr>
+        <p:style>
+          <a:lnRef xmlns:a="http://schemas.openxmlformats.org/drawingml/2006/main" idx="0"/>
+          <a:fillRef xmlns:a="http://schemas.openxmlformats.org/drawingml/2006/main" idx="0"/>
+          <a:effectRef xmlns:a="http://schemas.openxmlformats.org/drawingml/2006/main" idx="4"/>
+          <a:fontRef xmlns:a="http://schemas.openxmlformats.org/drawingml/2006/main" idx="major"/>
+        </p:style>
+        <p:txBody>
+          <a:bodyPr xmlns:a="http://schemas.openxmlformats.org/drawingml/2006/main" lIns="0" tIns="0" rIns="0" bIns="0" anchor="ctr">
+            <a:normAutofit fontScale="100000"/>
+          </a:bodyPr>
+          <a:lstStyle xmlns:a="http://schemas.openxmlformats.org/drawingml/2006/main"/>
+          <a:p xmlns:a="http://schemas.openxmlformats.org/drawingml/2006/main">
+            <a:pPr algn="ctr">
+              <a:defRPr sz="1200" b="1">
+                <a:solidFill>
+                  <a:srgbClr val="00A8D8"/>
+                </a:solidFill>
+                <a:latin typeface="Microsoft YaHei"/>
+                <a:ea typeface="Microsoft YaHei"/>
+                <a:cs typeface="Microsoft YaHei"/>
+              </a:defRPr>
+            </a:pPr>
+            <a:r>
+              <a:rPr sz="1200" b="1">
+                <a:solidFill>
+                  <a:srgbClr val="00A8D8"/>
+                </a:solidFill>
+                <a:latin typeface="Microsoft YaHei"/>
+                <a:ea typeface="Microsoft YaHei"/>
+                <a:cs typeface="Microsoft YaHei"/>
+              </a:rPr>
+              <a:t>04</a:t>
+            </a:r>
+          </a:p>
+        </p:txBody>
+      </p:sp>
+      <p:sp>
+        <p:nvSpPr>
+          <p:cNvPr id="44" name="">
+            <a:extLst xmlns:a="http://schemas.openxmlformats.org/drawingml/2006/main">
+              <a:ext uri="{FF2B5EF4-FFF2-40B4-BE49-F238E27FC236}">
+                <a16:creationId xmlns:a16="http://schemas.microsoft.com/office/drawing/2014/main" id="{848BB9C2-D429-4F34-BB58-B0B79735CB91}"/>
+              </a:ext>
+            </a:extLst>
+          </p:cNvPr>
+          <p:cNvSpPr>
+            <a:spLocks xmlns:a="http://schemas.openxmlformats.org/drawingml/2006/main" noGrp="1"/>
+          </p:cNvSpPr>
+          <p:nvPr/>
+        </p:nvSpPr>
+        <p:spPr>
+          <a:xfrm xmlns:a="http://schemas.openxmlformats.org/drawingml/2006/main">
+            <a:off x="10134600" y="3562350"/>
+            <a:ext cx="876300" cy="342900"/>
+          </a:xfrm>
+          <a:prstGeom xmlns:a="http://schemas.openxmlformats.org/drawingml/2006/main" prst="roundRect">
+            <a:avLst>
+              <a:gd name="adj" fmla="val 33333"/>
+            </a:avLst>
+          </a:prstGeom>
+          <a:solidFill xmlns:a="http://schemas.openxmlformats.org/drawingml/2006/main">
+            <a:srgbClr val="FFFFFF"/>
+          </a:solidFill>
+          <a:ln xmlns:a="http://schemas.openxmlformats.org/drawingml/2006/main" w="9525">
+            <a:solidFill>
+              <a:srgbClr val="D6E1EC"/>
+            </a:solidFill>
+            <a:prstDash val="solid"/>
+          </a:ln>
+        </p:spPr>
+        <p:style>
+          <a:lnRef xmlns:a="http://schemas.openxmlformats.org/drawingml/2006/main" idx="0"/>
+          <a:fillRef xmlns:a="http://schemas.openxmlformats.org/drawingml/2006/main" idx="0"/>
+          <a:effectRef xmlns:a="http://schemas.openxmlformats.org/drawingml/2006/main" idx="4"/>
+          <a:fontRef xmlns:a="http://schemas.openxmlformats.org/drawingml/2006/main" idx="major"/>
+        </p:style>
+        <p:txBody>
+          <a:bodyPr xmlns:a="http://schemas.openxmlformats.org/drawingml/2006/main" lIns="38100" tIns="9525" rIns="38100" bIns="9525" anchor="ctr">
+            <a:normAutofit fontScale="100000"/>
+          </a:bodyPr>
+          <a:lstStyle xmlns:a="http://schemas.openxmlformats.org/drawingml/2006/main"/>
+          <a:p xmlns:a="http://schemas.openxmlformats.org/drawingml/2006/main">
+            <a:pPr algn="ctr">
+              <a:defRPr sz="1200" b="1">
+                <a:solidFill>
+                  <a:srgbClr val="D99923"/>
+                </a:solidFill>
+                <a:latin typeface="Microsoft YaHei"/>
+                <a:ea typeface="Microsoft YaHei"/>
+                <a:cs typeface="Microsoft YaHei"/>
+              </a:defRPr>
+            </a:pPr>
+            <a:r>
+              <a:rPr sz="1200" b="1">
+                <a:solidFill>
+                  <a:srgbClr val="D99923"/>
+                </a:solidFill>
+                <a:latin typeface="Microsoft YaHei"/>
+                <a:ea typeface="Microsoft YaHei"/>
+                <a:cs typeface="Microsoft YaHei"/>
+              </a:rPr>
+              <a:t>2028</a:t>
+            </a:r>
+          </a:p>
+        </p:txBody>
+      </p:sp>
+      <p:sp>
+        <p:nvSpPr>
+          <p:cNvPr id="45" name="PPAGENT_QA|parent=dual-track-a-3|domains=dual-track-a-cards">
+            <a:extLst xmlns:a="http://schemas.openxmlformats.org/drawingml/2006/main">
+              <a:ext uri="{FF2B5EF4-FFF2-40B4-BE49-F238E27FC236}">
+                <a16:creationId xmlns:a16="http://schemas.microsoft.com/office/drawing/2014/main" id="{1A5F8846-5C68-4A6C-9A24-FBADB78A5980}"/>
+              </a:ext>
+            </a:extLst>
+          </p:cNvPr>
+          <p:cNvSpPr>
+            <a:spLocks xmlns:a="http://schemas.openxmlformats.org/drawingml/2006/main" noGrp="1"/>
+          </p:cNvSpPr>
+          <p:nvPr/>
+        </p:nvSpPr>
+        <p:spPr>
+          <a:xfrm xmlns:a="http://schemas.openxmlformats.org/drawingml/2006/main">
+            <a:off x="9715500" y="1390650"/>
+            <a:ext cx="1714500" cy="1066800"/>
+          </a:xfrm>
+          <a:prstGeom xmlns:a="http://schemas.openxmlformats.org/drawingml/2006/main" prst="roundRect">
+            <a:avLst>
+              <a:gd name="adj" fmla="val 10714"/>
+            </a:avLst>
+          </a:prstGeom>
+          <a:solidFill xmlns:a="http://schemas.openxmlformats.org/drawingml/2006/main">
+            <a:srgbClr val="FFFFFF"/>
+          </a:solidFill>
+          <a:ln xmlns:a="http://schemas.openxmlformats.org/drawingml/2006/main" w="9525">
+            <a:solidFill>
+              <a:srgbClr val="BFD4E7"/>
+            </a:solidFill>
+            <a:prstDash val="solid"/>
+          </a:ln>
+        </p:spPr>
+        <p:style>
+          <a:lnRef xmlns:a="http://schemas.openxmlformats.org/drawingml/2006/main" idx="0"/>
+          <a:fillRef xmlns:a="http://schemas.openxmlformats.org/drawingml/2006/main" idx="0"/>
+          <a:effectRef xmlns:a="http://schemas.openxmlformats.org/drawingml/2006/main" idx="4"/>
+          <a:fontRef xmlns:a="http://schemas.openxmlformats.org/drawingml/2006/main" idx="major"/>
+        </p:style>
+      </p:sp>
+      <p:sp>
+        <p:nvSpPr>
+          <p:cNvPr id="46" name="">
+            <a:extLst xmlns:a="http://schemas.openxmlformats.org/drawingml/2006/main">
+              <a:ext uri="{FF2B5EF4-FFF2-40B4-BE49-F238E27FC236}">
+                <a16:creationId xmlns:a16="http://schemas.microsoft.com/office/drawing/2014/main" id="{6CB885D9-084F-4EF0-BF8B-956494FBA180}"/>
+              </a:ext>
+            </a:extLst>
+          </p:cNvPr>
+          <p:cNvSpPr>
+            <a:spLocks xmlns:a="http://schemas.openxmlformats.org/drawingml/2006/main" noGrp="1"/>
+          </p:cNvSpPr>
+          <p:nvPr/>
+        </p:nvSpPr>
+        <p:spPr>
+          <a:xfrm xmlns:a="http://schemas.openxmlformats.org/drawingml/2006/main">
+            <a:off x="9829800" y="1504950"/>
+            <a:ext cx="1485900" cy="323850"/>
+          </a:xfrm>
+          <a:prstGeom xmlns:a="http://schemas.openxmlformats.org/drawingml/2006/main" prst="rect">
+            <a:avLst/>
+          </a:prstGeom>
+          <a:noFill xmlns:a="http://schemas.openxmlformats.org/drawingml/2006/main"/>
+          <a:ln xmlns:a="http://schemas.openxmlformats.org/drawingml/2006/main" w="0">
+            <a:noFill/>
+            <a:prstDash val="solid"/>
+          </a:ln>
+        </p:spPr>
+        <p:txBody>
+          <a:bodyPr xmlns:a="http://schemas.openxmlformats.org/drawingml/2006/main" lIns="0" tIns="0" rIns="0" bIns="0" anchor="ctr">
+            <a:normAutofit fontScale="100000"/>
+          </a:bodyPr>
+          <a:lstStyle xmlns:a="http://schemas.openxmlformats.org/drawingml/2006/main"/>
+          <a:p xmlns:a="http://schemas.openxmlformats.org/drawingml/2006/main">
+            <a:pPr algn="ctr">
+              <a:defRPr sz="1350" b="1">
+                <a:solidFill>
+                  <a:srgbClr val="1677C8"/>
+                </a:solidFill>
+                <a:latin typeface="Microsoft YaHei"/>
+                <a:ea typeface="Microsoft YaHei"/>
+                <a:cs typeface="Microsoft YaHei"/>
+              </a:defRPr>
+            </a:pPr>
+            <a:r>
+              <a:rPr sz="1350" b="1">
+                <a:solidFill>
+                  <a:srgbClr val="1677C8"/>
+                </a:solidFill>
+                <a:latin typeface="Microsoft YaHei"/>
+                <a:ea typeface="Microsoft YaHei"/>
+                <a:cs typeface="Microsoft YaHei"/>
+              </a:rPr>
+              <a:t>规模运营</a:t>
+            </a:r>
+          </a:p>
+        </p:txBody>
+      </p:sp>
+      <p:sp>
+        <p:nvSpPr>
+          <p:cNvPr id="47" name="">
+            <a:extLst xmlns:a="http://schemas.openxmlformats.org/drawingml/2006/main">
+              <a:ext uri="{FF2B5EF4-FFF2-40B4-BE49-F238E27FC236}">
+                <a16:creationId xmlns:a16="http://schemas.microsoft.com/office/drawing/2014/main" id="{3046AF24-48C3-4357-B2FB-7CF2755C74C9}"/>
+              </a:ext>
+            </a:extLst>
+          </p:cNvPr>
+          <p:cNvSpPr>
+            <a:spLocks xmlns:a="http://schemas.openxmlformats.org/drawingml/2006/main" noGrp="1"/>
+          </p:cNvSpPr>
+          <p:nvPr/>
+        </p:nvSpPr>
+        <p:spPr>
+          <a:xfrm xmlns:a="http://schemas.openxmlformats.org/drawingml/2006/main">
+            <a:off x="9829800" y="1885950"/>
+            <a:ext cx="1485900" cy="457200"/>
+          </a:xfrm>
+          <a:prstGeom xmlns:a="http://schemas.openxmlformats.org/drawingml/2006/main" prst="rect">
+            <a:avLst/>
+          </a:prstGeom>
+          <a:noFill xmlns:a="http://schemas.openxmlformats.org/drawingml/2006/main"/>
+          <a:ln xmlns:a="http://schemas.openxmlformats.org/drawingml/2006/main" w="0">
+            <a:noFill/>
+            <a:prstDash val="solid"/>
+          </a:ln>
+        </p:spPr>
+        <p:txBody>
+          <a:bodyPr xmlns:a="http://schemas.openxmlformats.org/drawingml/2006/main" lIns="0" tIns="0" rIns="0" bIns="0" anchor="t">
+            <a:noAutofit/>
+          </a:bodyPr>
+          <a:lstStyle xmlns:a="http://schemas.openxmlformats.org/drawingml/2006/main"/>
+          <a:p xmlns:a="http://schemas.openxmlformats.org/drawingml/2006/main">
+            <a:pPr algn="ctr">
+              <a:defRPr sz="1200" b="0">
+                <a:solidFill>
+                  <a:srgbClr val="475569"/>
+                </a:solidFill>
+                <a:latin typeface="Microsoft YaHei"/>
+                <a:ea typeface="Microsoft YaHei"/>
+                <a:cs typeface="Microsoft YaHei"/>
+              </a:defRPr>
+            </a:pPr>
+            <a:r>
+              <a:rPr sz="1200" b="0">
+                <a:solidFill>
+                  <a:srgbClr val="475569"/>
+                </a:solidFill>
+                <a:latin typeface="Microsoft YaHei"/>
+                <a:ea typeface="Microsoft YaHei"/>
+                <a:cs typeface="Microsoft YaHei"/>
+              </a:rPr>
+              <a:t>让生产流程</a:t>
+            </a:r>
+          </a:p>
+          <a:p xmlns:a="http://schemas.openxmlformats.org/drawingml/2006/main">
+            <a:pPr algn="ctr">
+              <a:defRPr sz="1200" b="0">
+                <a:solidFill>
+                  <a:srgbClr val="475569"/>
+                </a:solidFill>
+                <a:latin typeface="Microsoft YaHei"/>
+                <a:ea typeface="Microsoft YaHei"/>
+                <a:cs typeface="Microsoft YaHei"/>
+              </a:defRPr>
+            </a:pPr>
+            <a:r>
+              <a:rPr sz="1200" b="0">
+                <a:solidFill>
+                  <a:srgbClr val="475569"/>
+                </a:solidFill>
+                <a:latin typeface="Microsoft YaHei"/>
+                <a:ea typeface="Microsoft YaHei"/>
+                <a:cs typeface="Microsoft YaHei"/>
+              </a:rPr>
+              <a:t>持续稳定运行</a:t>
+            </a:r>
+          </a:p>
+        </p:txBody>
+      </p:sp>
+      <p:sp>
+        <p:nvSpPr>
+          <p:cNvPr id="48" name="PPAGENT_QA|parent=dual-track-b-3|domains=dual-track-b-cards">
+            <a:extLst xmlns:a="http://schemas.openxmlformats.org/drawingml/2006/main">
+              <a:ext uri="{FF2B5EF4-FFF2-40B4-BE49-F238E27FC236}">
+                <a16:creationId xmlns:a16="http://schemas.microsoft.com/office/drawing/2014/main" id="{E2EDA28D-E907-475C-996F-639E530AD560}"/>
+              </a:ext>
+            </a:extLst>
+          </p:cNvPr>
+          <p:cNvSpPr>
+            <a:spLocks xmlns:a="http://schemas.openxmlformats.org/drawingml/2006/main" noGrp="1"/>
+          </p:cNvSpPr>
+          <p:nvPr/>
+        </p:nvSpPr>
+        <p:spPr>
+          <a:xfrm xmlns:a="http://schemas.openxmlformats.org/drawingml/2006/main">
+            <a:off x="9715500" y="5353050"/>
+            <a:ext cx="1714500" cy="914400"/>
+          </a:xfrm>
+          <a:prstGeom xmlns:a="http://schemas.openxmlformats.org/drawingml/2006/main" prst="roundRect">
+            <a:avLst>
+              <a:gd name="adj" fmla="val 12500"/>
+            </a:avLst>
+          </a:prstGeom>
+          <a:solidFill xmlns:a="http://schemas.openxmlformats.org/drawingml/2006/main">
+            <a:srgbClr val="FFFFFF"/>
+          </a:solidFill>
+          <a:ln xmlns:a="http://schemas.openxmlformats.org/drawingml/2006/main" w="9525">
+            <a:solidFill>
+              <a:srgbClr val="BFD4E7"/>
+            </a:solidFill>
+            <a:prstDash val="solid"/>
+          </a:ln>
+        </p:spPr>
+        <p:style>
+          <a:lnRef xmlns:a="http://schemas.openxmlformats.org/drawingml/2006/main" idx="0"/>
+          <a:fillRef xmlns:a="http://schemas.openxmlformats.org/drawingml/2006/main" idx="0"/>
+          <a:effectRef xmlns:a="http://schemas.openxmlformats.org/drawingml/2006/main" idx="4"/>
+          <a:fontRef xmlns:a="http://schemas.openxmlformats.org/drawingml/2006/main" idx="major"/>
+        </p:style>
+      </p:sp>
+      <p:sp>
+        <p:nvSpPr>
+          <p:cNvPr id="49" name="">
+            <a:extLst xmlns:a="http://schemas.openxmlformats.org/drawingml/2006/main">
+              <a:ext uri="{FF2B5EF4-FFF2-40B4-BE49-F238E27FC236}">
+                <a16:creationId xmlns:a16="http://schemas.microsoft.com/office/drawing/2014/main" id="{690B1FD6-5019-40A2-BEFA-9870EF81E394}"/>
+              </a:ext>
+            </a:extLst>
+          </p:cNvPr>
+          <p:cNvSpPr>
+            <a:spLocks xmlns:a="http://schemas.openxmlformats.org/drawingml/2006/main" noGrp="1"/>
+          </p:cNvSpPr>
+          <p:nvPr/>
+        </p:nvSpPr>
+        <p:spPr>
+          <a:xfrm xmlns:a="http://schemas.openxmlformats.org/drawingml/2006/main">
+            <a:off x="9829800" y="5448300"/>
+            <a:ext cx="1485900" cy="304800"/>
+          </a:xfrm>
+          <a:prstGeom xmlns:a="http://schemas.openxmlformats.org/drawingml/2006/main" prst="rect">
+            <a:avLst/>
+          </a:prstGeom>
+          <a:noFill xmlns:a="http://schemas.openxmlformats.org/drawingml/2006/main"/>
+          <a:ln xmlns:a="http://schemas.openxmlformats.org/drawingml/2006/main" w="0">
+            <a:noFill/>
+            <a:prstDash val="solid"/>
+          </a:ln>
+        </p:spPr>
+        <p:txBody>
+          <a:bodyPr xmlns:a="http://schemas.openxmlformats.org/drawingml/2006/main" lIns="0" tIns="0" rIns="0" bIns="0" anchor="ctr">
+            <a:normAutofit fontScale="100000"/>
+          </a:bodyPr>
+          <a:lstStyle xmlns:a="http://schemas.openxmlformats.org/drawingml/2006/main"/>
+          <a:p xmlns:a="http://schemas.openxmlformats.org/drawingml/2006/main">
+            <a:pPr algn="ctr">
+              <a:defRPr sz="1350" b="1">
+                <a:solidFill>
+                  <a:srgbClr val="00A8D8"/>
+                </a:solidFill>
+                <a:latin typeface="Microsoft YaHei"/>
+                <a:ea typeface="Microsoft YaHei"/>
+                <a:cs typeface="Microsoft YaHei"/>
+              </a:defRPr>
+            </a:pPr>
+            <a:r>
+              <a:rPr sz="1350" b="1">
+                <a:solidFill>
+                  <a:srgbClr val="00A8D8"/>
+                </a:solidFill>
+                <a:latin typeface="Microsoft YaHei"/>
+                <a:ea typeface="Microsoft YaHei"/>
+                <a:cs typeface="Microsoft YaHei"/>
+              </a:rPr>
+              <a:t>智能协同</a:t>
+            </a:r>
+          </a:p>
+        </p:txBody>
+      </p:sp>
+      <p:sp>
+        <p:nvSpPr>
+          <p:cNvPr id="50" name="">
+            <a:extLst xmlns:a="http://schemas.openxmlformats.org/drawingml/2006/main">
+              <a:ext uri="{FF2B5EF4-FFF2-40B4-BE49-F238E27FC236}">
+                <a16:creationId xmlns:a16="http://schemas.microsoft.com/office/drawing/2014/main" id="{C1A5FF44-B098-4347-B409-5442853A1BE1}"/>
+              </a:ext>
+            </a:extLst>
+          </p:cNvPr>
+          <p:cNvSpPr>
+            <a:spLocks xmlns:a="http://schemas.openxmlformats.org/drawingml/2006/main" noGrp="1"/>
+          </p:cNvSpPr>
+          <p:nvPr/>
+        </p:nvSpPr>
+        <p:spPr>
+          <a:xfrm xmlns:a="http://schemas.openxmlformats.org/drawingml/2006/main">
+            <a:off x="9829800" y="5791200"/>
+            <a:ext cx="1485900" cy="381000"/>
+          </a:xfrm>
+          <a:prstGeom xmlns:a="http://schemas.openxmlformats.org/drawingml/2006/main" prst="rect">
+            <a:avLst/>
+          </a:prstGeom>
+          <a:noFill xmlns:a="http://schemas.openxmlformats.org/drawingml/2006/main"/>
+          <a:ln xmlns:a="http://schemas.openxmlformats.org/drawingml/2006/main" w="0">
+            <a:noFill/>
+            <a:prstDash val="solid"/>
+          </a:ln>
+        </p:spPr>
+        <p:txBody>
+          <a:bodyPr xmlns:a="http://schemas.openxmlformats.org/drawingml/2006/main" lIns="0" tIns="0" rIns="0" bIns="0" anchor="t">
+            <a:noAutofit/>
+          </a:bodyPr>
+          <a:lstStyle xmlns:a="http://schemas.openxmlformats.org/drawingml/2006/main"/>
+          <a:p xmlns:a="http://schemas.openxmlformats.org/drawingml/2006/main">
+            <a:pPr algn="ctr">
+              <a:defRPr sz="1200" b="0">
+                <a:solidFill>
+                  <a:srgbClr val="475569"/>
+                </a:solidFill>
+                <a:latin typeface="Microsoft YaHei"/>
+                <a:ea typeface="Microsoft YaHei"/>
+                <a:cs typeface="Microsoft YaHei"/>
+              </a:defRPr>
+            </a:pPr>
+            <a:r>
+              <a:rPr sz="1200" b="0">
+                <a:solidFill>
+                  <a:srgbClr val="475569"/>
+                </a:solidFill>
+                <a:latin typeface="Microsoft YaHei"/>
+                <a:ea typeface="Microsoft YaHei"/>
+                <a:cs typeface="Microsoft YaHei"/>
+              </a:rPr>
+              <a:t>双导演与资产</a:t>
+            </a:r>
+          </a:p>
+          <a:p xmlns:a="http://schemas.openxmlformats.org/drawingml/2006/main">
+            <a:pPr algn="ctr">
+              <a:defRPr sz="1200" b="0">
+                <a:solidFill>
+                  <a:srgbClr val="475569"/>
+                </a:solidFill>
+                <a:latin typeface="Microsoft YaHei"/>
+                <a:ea typeface="Microsoft YaHei"/>
+                <a:cs typeface="Microsoft YaHei"/>
+              </a:defRPr>
+            </a:pPr>
+            <a:r>
+              <a:rPr sz="1200" b="0">
+                <a:solidFill>
+                  <a:srgbClr val="475569"/>
+                </a:solidFill>
+                <a:latin typeface="Microsoft YaHei"/>
+                <a:ea typeface="Microsoft YaHei"/>
+                <a:cs typeface="Microsoft YaHei"/>
+              </a:rPr>
+              <a:t>运行时协同</a:t>
+            </a:r>
+          </a:p>
+        </p:txBody>
       </p:sp>
     </p:spTree>
     <p:extLst>
       <p:ext uri="{BB962C8B-B14F-4D97-AF65-F5344CB8AC3E}">
-        <p14:creationId xmlns:p14="http://schemas.microsoft.com/office/powerpoint/2010/main" val="943007957"/>
+        <p14:creationId xmlns:p14="http://schemas.microsoft.com/office/powerpoint/2010/main" val="1646445039"/>
       </p:ext>
     </p:extLst>
   </p:cSld>
